--- a/lectures/Lecture_01_Intro_to_community_ecology.pptx
+++ b/lectures/Lecture_01_Intro_to_community_ecology.pptx
@@ -41,6 +41,7 @@
     <p:sldId id="286" r:id="rId36"/>
     <p:sldId id="287" r:id="rId37"/>
     <p:sldId id="288" r:id="rId38"/>
+    <p:sldId id="289" r:id="rId39"/>
   </p:sldIdLst>
   <p:sldSz cy="5143500" cx="9144000"/>
   <p:notesSz cx="6858000" cy="9144000"/>
@@ -836,7 +837,7 @@
       </p:grpSpPr>
       <p:sp>
         <p:nvSpPr>
-          <p:cNvPr id="105" name="Google Shape;105;g324606db874_0_41:notes"/>
+          <p:cNvPr id="105" name="Google Shape;105;g3b66992c8b1_0_0:notes"/>
           <p:cNvSpPr/>
           <p:nvPr>
             <p:ph idx="2" type="sldImg"/>
@@ -871,7 +872,7 @@
       </p:sp>
       <p:sp>
         <p:nvSpPr>
-          <p:cNvPr id="106" name="Google Shape;106;g324606db874_0_41:notes"/>
+          <p:cNvPr id="106" name="Google Shape;106;g3b66992c8b1_0_0:notes"/>
           <p:cNvSpPr txBox="1"/>
           <p:nvPr>
             <p:ph idx="1" type="body"/>
@@ -921,7 +922,7 @@
   <p:cSld>
     <p:spTree>
       <p:nvGrpSpPr>
-        <p:cNvPr id="109" name="Shape 109"/>
+        <p:cNvPr id="110" name="Shape 110"/>
         <p:cNvGrpSpPr/>
         <p:nvPr/>
       </p:nvGrpSpPr>
@@ -935,7 +936,7 @@
       </p:grpSpPr>
       <p:sp>
         <p:nvSpPr>
-          <p:cNvPr id="110" name="Google Shape;110;g324606db874_0_45:notes"/>
+          <p:cNvPr id="111" name="Google Shape;111;g324606db874_0_41:notes"/>
           <p:cNvSpPr/>
           <p:nvPr>
             <p:ph idx="2" type="sldImg"/>
@@ -970,7 +971,7 @@
       </p:sp>
       <p:sp>
         <p:nvSpPr>
-          <p:cNvPr id="111" name="Google Shape;111;g324606db874_0_45:notes"/>
+          <p:cNvPr id="112" name="Google Shape;112;g324606db874_0_41:notes"/>
           <p:cNvSpPr txBox="1"/>
           <p:nvPr>
             <p:ph idx="1" type="body"/>
@@ -1034,7 +1035,7 @@
       </p:grpSpPr>
       <p:sp>
         <p:nvSpPr>
-          <p:cNvPr id="116" name="Google Shape;116;g324606db874_0_51:notes"/>
+          <p:cNvPr id="116" name="Google Shape;116;g324606db874_0_45:notes"/>
           <p:cNvSpPr/>
           <p:nvPr>
             <p:ph idx="2" type="sldImg"/>
@@ -1069,7 +1070,7 @@
       </p:sp>
       <p:sp>
         <p:nvSpPr>
-          <p:cNvPr id="117" name="Google Shape;117;g324606db874_0_51:notes"/>
+          <p:cNvPr id="117" name="Google Shape;117;g324606db874_0_45:notes"/>
           <p:cNvSpPr txBox="1"/>
           <p:nvPr>
             <p:ph idx="1" type="body"/>
@@ -1133,7 +1134,7 @@
       </p:grpSpPr>
       <p:sp>
         <p:nvSpPr>
-          <p:cNvPr id="122" name="Google Shape;122;g324606db874_0_117:notes"/>
+          <p:cNvPr id="122" name="Google Shape;122;g324606db874_0_51:notes"/>
           <p:cNvSpPr/>
           <p:nvPr>
             <p:ph idx="2" type="sldImg"/>
@@ -1168,7 +1169,7 @@
       </p:sp>
       <p:sp>
         <p:nvSpPr>
-          <p:cNvPr id="123" name="Google Shape;123;g324606db874_0_117:notes"/>
+          <p:cNvPr id="123" name="Google Shape;123;g324606db874_0_51:notes"/>
           <p:cNvSpPr txBox="1"/>
           <p:nvPr>
             <p:ph idx="1" type="body"/>
@@ -1232,7 +1233,7 @@
       </p:grpSpPr>
       <p:sp>
         <p:nvSpPr>
-          <p:cNvPr id="128" name="Google Shape;128;g324606db874_0_56:notes"/>
+          <p:cNvPr id="128" name="Google Shape;128;g324606db874_0_117:notes"/>
           <p:cNvSpPr/>
           <p:nvPr>
             <p:ph idx="2" type="sldImg"/>
@@ -1267,7 +1268,7 @@
       </p:sp>
       <p:sp>
         <p:nvSpPr>
-          <p:cNvPr id="129" name="Google Shape;129;g324606db874_0_56:notes"/>
+          <p:cNvPr id="129" name="Google Shape;129;g324606db874_0_117:notes"/>
           <p:cNvSpPr txBox="1"/>
           <p:nvPr>
             <p:ph idx="1" type="body"/>
@@ -1331,7 +1332,7 @@
       </p:grpSpPr>
       <p:sp>
         <p:nvSpPr>
-          <p:cNvPr id="134" name="Google Shape;134;g324606db874_0_87:notes"/>
+          <p:cNvPr id="134" name="Google Shape;134;g324606db874_0_56:notes"/>
           <p:cNvSpPr/>
           <p:nvPr>
             <p:ph idx="2" type="sldImg"/>
@@ -1366,7 +1367,7 @@
       </p:sp>
       <p:sp>
         <p:nvSpPr>
-          <p:cNvPr id="135" name="Google Shape;135;g324606db874_0_87:notes"/>
+          <p:cNvPr id="135" name="Google Shape;135;g324606db874_0_56:notes"/>
           <p:cNvSpPr txBox="1"/>
           <p:nvPr>
             <p:ph idx="1" type="body"/>
@@ -1416,7 +1417,7 @@
   <p:cSld>
     <p:spTree>
       <p:nvGrpSpPr>
-        <p:cNvPr id="141" name="Shape 141"/>
+        <p:cNvPr id="139" name="Shape 139"/>
         <p:cNvGrpSpPr/>
         <p:nvPr/>
       </p:nvGrpSpPr>
@@ -1430,7 +1431,7 @@
       </p:grpSpPr>
       <p:sp>
         <p:nvSpPr>
-          <p:cNvPr id="142" name="Google Shape;142;g324606db874_0_72:notes"/>
+          <p:cNvPr id="140" name="Google Shape;140;g324606db874_0_87:notes"/>
           <p:cNvSpPr/>
           <p:nvPr>
             <p:ph idx="2" type="sldImg"/>
@@ -1465,7 +1466,7 @@
       </p:sp>
       <p:sp>
         <p:nvSpPr>
-          <p:cNvPr id="143" name="Google Shape;143;g324606db874_0_72:notes"/>
+          <p:cNvPr id="141" name="Google Shape;141;g324606db874_0_87:notes"/>
           <p:cNvSpPr txBox="1"/>
           <p:nvPr>
             <p:ph idx="1" type="body"/>
@@ -1515,7 +1516,7 @@
   <p:cSld>
     <p:spTree>
       <p:nvGrpSpPr>
-        <p:cNvPr id="152" name="Shape 152"/>
+        <p:cNvPr id="147" name="Shape 147"/>
         <p:cNvGrpSpPr/>
         <p:nvPr/>
       </p:nvGrpSpPr>
@@ -1529,7 +1530,7 @@
       </p:grpSpPr>
       <p:sp>
         <p:nvSpPr>
-          <p:cNvPr id="153" name="Google Shape;153;g324606db874_0_102:notes"/>
+          <p:cNvPr id="148" name="Google Shape;148;g324606db874_0_72:notes"/>
           <p:cNvSpPr/>
           <p:nvPr>
             <p:ph idx="2" type="sldImg"/>
@@ -1564,7 +1565,7 @@
       </p:sp>
       <p:sp>
         <p:nvSpPr>
-          <p:cNvPr id="154" name="Google Shape;154;g324606db874_0_102:notes"/>
+          <p:cNvPr id="149" name="Google Shape;149;g324606db874_0_72:notes"/>
           <p:cNvSpPr txBox="1"/>
           <p:nvPr>
             <p:ph idx="1" type="body"/>
@@ -1614,7 +1615,7 @@
   <p:cSld>
     <p:spTree>
       <p:nvGrpSpPr>
-        <p:cNvPr id="168" name="Shape 168"/>
+        <p:cNvPr id="158" name="Shape 158"/>
         <p:cNvGrpSpPr/>
         <p:nvPr/>
       </p:nvGrpSpPr>
@@ -1628,7 +1629,7 @@
       </p:grpSpPr>
       <p:sp>
         <p:nvSpPr>
-          <p:cNvPr id="169" name="Google Shape;169;g324606db874_0_122:notes"/>
+          <p:cNvPr id="159" name="Google Shape;159;g324606db874_0_102:notes"/>
           <p:cNvSpPr/>
           <p:nvPr>
             <p:ph idx="2" type="sldImg"/>
@@ -1663,7 +1664,7 @@
       </p:sp>
       <p:sp>
         <p:nvSpPr>
-          <p:cNvPr id="170" name="Google Shape;170;g324606db874_0_122:notes"/>
+          <p:cNvPr id="160" name="Google Shape;160;g324606db874_0_102:notes"/>
           <p:cNvSpPr txBox="1"/>
           <p:nvPr>
             <p:ph idx="1" type="body"/>
@@ -1713,7 +1714,7 @@
   <p:cSld>
     <p:spTree>
       <p:nvGrpSpPr>
-        <p:cNvPr id="173" name="Shape 173"/>
+        <p:cNvPr id="174" name="Shape 174"/>
         <p:cNvGrpSpPr/>
         <p:nvPr/>
       </p:nvGrpSpPr>
@@ -1727,7 +1728,7 @@
       </p:grpSpPr>
       <p:sp>
         <p:nvSpPr>
-          <p:cNvPr id="174" name="Google Shape;174;g324606db874_0_127:notes"/>
+          <p:cNvPr id="175" name="Google Shape;175;g324606db874_0_122:notes"/>
           <p:cNvSpPr/>
           <p:nvPr>
             <p:ph idx="2" type="sldImg"/>
@@ -1762,7 +1763,7 @@
       </p:sp>
       <p:sp>
         <p:nvSpPr>
-          <p:cNvPr id="175" name="Google Shape;175;g324606db874_0_127:notes"/>
+          <p:cNvPr id="176" name="Google Shape;176;g324606db874_0_122:notes"/>
           <p:cNvSpPr txBox="1"/>
           <p:nvPr>
             <p:ph idx="1" type="body"/>
@@ -1911,7 +1912,7 @@
   <p:cSld>
     <p:spTree>
       <p:nvGrpSpPr>
-        <p:cNvPr id="178" name="Shape 178"/>
+        <p:cNvPr id="179" name="Shape 179"/>
         <p:cNvGrpSpPr/>
         <p:nvPr/>
       </p:nvGrpSpPr>
@@ -1925,7 +1926,7 @@
       </p:grpSpPr>
       <p:sp>
         <p:nvSpPr>
-          <p:cNvPr id="179" name="Google Shape;179;g324606db874_0_134:notes"/>
+          <p:cNvPr id="180" name="Google Shape;180;g324606db874_0_127:notes"/>
           <p:cNvSpPr/>
           <p:nvPr>
             <p:ph idx="2" type="sldImg"/>
@@ -1960,7 +1961,7 @@
       </p:sp>
       <p:sp>
         <p:nvSpPr>
-          <p:cNvPr id="180" name="Google Shape;180;g324606db874_0_134:notes"/>
+          <p:cNvPr id="181" name="Google Shape;181;g324606db874_0_127:notes"/>
           <p:cNvSpPr txBox="1"/>
           <p:nvPr>
             <p:ph idx="1" type="body"/>
@@ -2010,7 +2011,7 @@
   <p:cSld>
     <p:spTree>
       <p:nvGrpSpPr>
-        <p:cNvPr id="187" name="Shape 187"/>
+        <p:cNvPr id="184" name="Shape 184"/>
         <p:cNvGrpSpPr/>
         <p:nvPr/>
       </p:nvGrpSpPr>
@@ -2024,7 +2025,7 @@
       </p:grpSpPr>
       <p:sp>
         <p:nvSpPr>
-          <p:cNvPr id="188" name="Google Shape;188;g2d7a5c21749_0_0:notes"/>
+          <p:cNvPr id="185" name="Google Shape;185;g324606db874_0_134:notes"/>
           <p:cNvSpPr/>
           <p:nvPr>
             <p:ph idx="2" type="sldImg"/>
@@ -2059,7 +2060,7 @@
       </p:sp>
       <p:sp>
         <p:nvSpPr>
-          <p:cNvPr id="189" name="Google Shape;189;g2d7a5c21749_0_0:notes"/>
+          <p:cNvPr id="186" name="Google Shape;186;g324606db874_0_134:notes"/>
           <p:cNvSpPr txBox="1"/>
           <p:nvPr>
             <p:ph idx="1" type="body"/>
@@ -2109,7 +2110,7 @@
   <p:cSld>
     <p:spTree>
       <p:nvGrpSpPr>
-        <p:cNvPr id="194" name="Shape 194"/>
+        <p:cNvPr id="193" name="Shape 193"/>
         <p:cNvGrpSpPr/>
         <p:nvPr/>
       </p:nvGrpSpPr>
@@ -2123,7 +2124,7 @@
       </p:grpSpPr>
       <p:sp>
         <p:nvSpPr>
-          <p:cNvPr id="195" name="Google Shape;195;g2d7a5c21749_0_11:notes"/>
+          <p:cNvPr id="194" name="Google Shape;194;g2d7a5c21749_0_0:notes"/>
           <p:cNvSpPr/>
           <p:nvPr>
             <p:ph idx="2" type="sldImg"/>
@@ -2158,7 +2159,7 @@
       </p:sp>
       <p:sp>
         <p:nvSpPr>
-          <p:cNvPr id="196" name="Google Shape;196;g2d7a5c21749_0_11:notes"/>
+          <p:cNvPr id="195" name="Google Shape;195;g2d7a5c21749_0_0:notes"/>
           <p:cNvSpPr txBox="1"/>
           <p:nvPr>
             <p:ph idx="1" type="body"/>
@@ -2222,7 +2223,7 @@
       </p:grpSpPr>
       <p:sp>
         <p:nvSpPr>
-          <p:cNvPr id="201" name="Google Shape;201;g2d7a5c21749_0_26:notes"/>
+          <p:cNvPr id="201" name="Google Shape;201;g2d7a5c21749_0_11:notes"/>
           <p:cNvSpPr/>
           <p:nvPr>
             <p:ph idx="2" type="sldImg"/>
@@ -2257,7 +2258,7 @@
       </p:sp>
       <p:sp>
         <p:nvSpPr>
-          <p:cNvPr id="202" name="Google Shape;202;g2d7a5c21749_0_26:notes"/>
+          <p:cNvPr id="202" name="Google Shape;202;g2d7a5c21749_0_11:notes"/>
           <p:cNvSpPr txBox="1"/>
           <p:nvPr>
             <p:ph idx="1" type="body"/>
@@ -2307,7 +2308,7 @@
   <p:cSld>
     <p:spTree>
       <p:nvGrpSpPr>
-        <p:cNvPr id="210" name="Shape 210"/>
+        <p:cNvPr id="206" name="Shape 206"/>
         <p:cNvGrpSpPr/>
         <p:nvPr/>
       </p:nvGrpSpPr>
@@ -2321,7 +2322,7 @@
       </p:grpSpPr>
       <p:sp>
         <p:nvSpPr>
-          <p:cNvPr id="211" name="Google Shape;211;g2d7a5c21749_0_37:notes"/>
+          <p:cNvPr id="207" name="Google Shape;207;g2d7a5c21749_0_26:notes"/>
           <p:cNvSpPr/>
           <p:nvPr>
             <p:ph idx="2" type="sldImg"/>
@@ -2356,7 +2357,7 @@
       </p:sp>
       <p:sp>
         <p:nvSpPr>
-          <p:cNvPr id="212" name="Google Shape;212;g2d7a5c21749_0_37:notes"/>
+          <p:cNvPr id="208" name="Google Shape;208;g2d7a5c21749_0_26:notes"/>
           <p:cNvSpPr txBox="1"/>
           <p:nvPr>
             <p:ph idx="1" type="body"/>
@@ -2406,7 +2407,7 @@
   <p:cSld>
     <p:spTree>
       <p:nvGrpSpPr>
-        <p:cNvPr id="218" name="Shape 218"/>
+        <p:cNvPr id="216" name="Shape 216"/>
         <p:cNvGrpSpPr/>
         <p:nvPr/>
       </p:nvGrpSpPr>
@@ -2420,7 +2421,7 @@
       </p:grpSpPr>
       <p:sp>
         <p:nvSpPr>
-          <p:cNvPr id="219" name="Google Shape;219;g2d7a5c21749_0_16:notes"/>
+          <p:cNvPr id="217" name="Google Shape;217;g2d7a5c21749_0_37:notes"/>
           <p:cNvSpPr/>
           <p:nvPr>
             <p:ph idx="2" type="sldImg"/>
@@ -2455,7 +2456,7 @@
       </p:sp>
       <p:sp>
         <p:nvSpPr>
-          <p:cNvPr id="220" name="Google Shape;220;g2d7a5c21749_0_16:notes"/>
+          <p:cNvPr id="218" name="Google Shape;218;g2d7a5c21749_0_37:notes"/>
           <p:cNvSpPr txBox="1"/>
           <p:nvPr>
             <p:ph idx="1" type="body"/>
@@ -2519,7 +2520,7 @@
       </p:grpSpPr>
       <p:sp>
         <p:nvSpPr>
-          <p:cNvPr id="225" name="Google Shape;225;g2d7a5c21749_0_21:notes"/>
+          <p:cNvPr id="225" name="Google Shape;225;g2d7a5c21749_0_16:notes"/>
           <p:cNvSpPr/>
           <p:nvPr>
             <p:ph idx="2" type="sldImg"/>
@@ -2554,7 +2555,7 @@
       </p:sp>
       <p:sp>
         <p:nvSpPr>
-          <p:cNvPr id="226" name="Google Shape;226;g2d7a5c21749_0_21:notes"/>
+          <p:cNvPr id="226" name="Google Shape;226;g2d7a5c21749_0_16:notes"/>
           <p:cNvSpPr txBox="1"/>
           <p:nvPr>
             <p:ph idx="1" type="body"/>
@@ -2604,7 +2605,7 @@
   <p:cSld>
     <p:spTree>
       <p:nvGrpSpPr>
-        <p:cNvPr id="231" name="Shape 231"/>
+        <p:cNvPr id="230" name="Shape 230"/>
         <p:cNvGrpSpPr/>
         <p:nvPr/>
       </p:nvGrpSpPr>
@@ -2618,7 +2619,7 @@
       </p:grpSpPr>
       <p:sp>
         <p:nvSpPr>
-          <p:cNvPr id="232" name="Google Shape;232;g2d7a5c21749_0_60:notes"/>
+          <p:cNvPr id="231" name="Google Shape;231;g2d7a5c21749_0_21:notes"/>
           <p:cNvSpPr/>
           <p:nvPr>
             <p:ph idx="2" type="sldImg"/>
@@ -2653,7 +2654,7 @@
       </p:sp>
       <p:sp>
         <p:nvSpPr>
-          <p:cNvPr id="233" name="Google Shape;233;g2d7a5c21749_0_60:notes"/>
+          <p:cNvPr id="232" name="Google Shape;232;g2d7a5c21749_0_21:notes"/>
           <p:cNvSpPr txBox="1"/>
           <p:nvPr>
             <p:ph idx="1" type="body"/>
@@ -2703,7 +2704,7 @@
   <p:cSld>
     <p:spTree>
       <p:nvGrpSpPr>
-        <p:cNvPr id="239" name="Shape 239"/>
+        <p:cNvPr id="237" name="Shape 237"/>
         <p:cNvGrpSpPr/>
         <p:nvPr/>
       </p:nvGrpSpPr>
@@ -2717,7 +2718,7 @@
       </p:grpSpPr>
       <p:sp>
         <p:nvSpPr>
-          <p:cNvPr id="240" name="Google Shape;240;g2d7a5c21749_0_68:notes"/>
+          <p:cNvPr id="238" name="Google Shape;238;g2d7a5c21749_0_60:notes"/>
           <p:cNvSpPr/>
           <p:nvPr>
             <p:ph idx="2" type="sldImg"/>
@@ -2752,7 +2753,7 @@
       </p:sp>
       <p:sp>
         <p:nvSpPr>
-          <p:cNvPr id="241" name="Google Shape;241;g2d7a5c21749_0_68:notes"/>
+          <p:cNvPr id="239" name="Google Shape;239;g2d7a5c21749_0_60:notes"/>
           <p:cNvSpPr txBox="1"/>
           <p:nvPr>
             <p:ph idx="1" type="body"/>
@@ -2802,7 +2803,7 @@
   <p:cSld>
     <p:spTree>
       <p:nvGrpSpPr>
-        <p:cNvPr id="248" name="Shape 248"/>
+        <p:cNvPr id="245" name="Shape 245"/>
         <p:cNvGrpSpPr/>
         <p:nvPr/>
       </p:nvGrpSpPr>
@@ -2816,7 +2817,7 @@
       </p:grpSpPr>
       <p:sp>
         <p:nvSpPr>
-          <p:cNvPr id="249" name="Google Shape;249;g2d7a5c21749_0_55:notes"/>
+          <p:cNvPr id="246" name="Google Shape;246;g2d7a5c21749_0_68:notes"/>
           <p:cNvSpPr/>
           <p:nvPr>
             <p:ph idx="2" type="sldImg"/>
@@ -2851,7 +2852,7 @@
       </p:sp>
       <p:sp>
         <p:nvSpPr>
-          <p:cNvPr id="250" name="Google Shape;250;g2d7a5c21749_0_55:notes"/>
+          <p:cNvPr id="247" name="Google Shape;247;g2d7a5c21749_0_68:notes"/>
           <p:cNvSpPr txBox="1"/>
           <p:nvPr>
             <p:ph idx="1" type="body"/>
@@ -3000,7 +3001,7 @@
   <p:cSld>
     <p:spTree>
       <p:nvGrpSpPr>
-        <p:cNvPr id="255" name="Shape 255"/>
+        <p:cNvPr id="254" name="Shape 254"/>
         <p:cNvGrpSpPr/>
         <p:nvPr/>
       </p:nvGrpSpPr>
@@ -3014,7 +3015,7 @@
       </p:grpSpPr>
       <p:sp>
         <p:nvSpPr>
-          <p:cNvPr id="256" name="Google Shape;256;g2d7a5c21749_0_77:notes"/>
+          <p:cNvPr id="255" name="Google Shape;255;g2d7a5c21749_0_55:notes"/>
           <p:cNvSpPr/>
           <p:nvPr>
             <p:ph idx="2" type="sldImg"/>
@@ -3049,7 +3050,7 @@
       </p:sp>
       <p:sp>
         <p:nvSpPr>
-          <p:cNvPr id="257" name="Google Shape;257;g2d7a5c21749_0_77:notes"/>
+          <p:cNvPr id="256" name="Google Shape;256;g2d7a5c21749_0_55:notes"/>
           <p:cNvSpPr txBox="1"/>
           <p:nvPr>
             <p:ph idx="1" type="body"/>
@@ -3080,8 +3081,7 @@
               <a:buNone/>
             </a:pPr>
             <a:r>
-              <a:rPr lang="en"/>
-              <a:t>Can project onto a whiteboard and color in the overlapping areas with dry erase marker</a:t>
+              <a:t/>
             </a:r>
             <a:endParaRPr/>
           </a:p>
@@ -3100,7 +3100,7 @@
   <p:cSld>
     <p:spTree>
       <p:nvGrpSpPr>
-        <p:cNvPr id="262" name="Shape 262"/>
+        <p:cNvPr id="261" name="Shape 261"/>
         <p:cNvGrpSpPr/>
         <p:nvPr/>
       </p:nvGrpSpPr>
@@ -3114,7 +3114,7 @@
       </p:grpSpPr>
       <p:sp>
         <p:nvSpPr>
-          <p:cNvPr id="263" name="Google Shape;263;g2d7b1fd0d0f_0_0:notes"/>
+          <p:cNvPr id="262" name="Google Shape;262;g2d7a5c21749_0_77:notes"/>
           <p:cNvSpPr/>
           <p:nvPr>
             <p:ph idx="2" type="sldImg"/>
@@ -3149,7 +3149,7 @@
       </p:sp>
       <p:sp>
         <p:nvSpPr>
-          <p:cNvPr id="264" name="Google Shape;264;g2d7b1fd0d0f_0_0:notes"/>
+          <p:cNvPr id="263" name="Google Shape;263;g2d7a5c21749_0_77:notes"/>
           <p:cNvSpPr txBox="1"/>
           <p:nvPr>
             <p:ph idx="1" type="body"/>
@@ -3180,7 +3180,8 @@
               <a:buNone/>
             </a:pPr>
             <a:r>
-              <a:t/>
+              <a:rPr lang="en"/>
+              <a:t>Can project onto a whiteboard and color in the overlapping areas with dry erase marker</a:t>
             </a:r>
             <a:endParaRPr/>
           </a:p>
@@ -3213,7 +3214,7 @@
       </p:grpSpPr>
       <p:sp>
         <p:nvSpPr>
-          <p:cNvPr id="269" name="Google Shape;269;g2d7b1fd0d0f_0_5:notes"/>
+          <p:cNvPr id="269" name="Google Shape;269;g2d7b1fd0d0f_0_0:notes"/>
           <p:cNvSpPr/>
           <p:nvPr>
             <p:ph idx="2" type="sldImg"/>
@@ -3248,7 +3249,7 @@
       </p:sp>
       <p:sp>
         <p:nvSpPr>
-          <p:cNvPr id="270" name="Google Shape;270;g2d7b1fd0d0f_0_5:notes"/>
+          <p:cNvPr id="270" name="Google Shape;270;g2d7b1fd0d0f_0_0:notes"/>
           <p:cNvSpPr txBox="1"/>
           <p:nvPr>
             <p:ph idx="1" type="body"/>
@@ -3312,7 +3313,7 @@
       </p:grpSpPr>
       <p:sp>
         <p:nvSpPr>
-          <p:cNvPr id="275" name="Google Shape;275;g2d7b1fd0d0f_0_10:notes"/>
+          <p:cNvPr id="275" name="Google Shape;275;g2d7b1fd0d0f_0_5:notes"/>
           <p:cNvSpPr/>
           <p:nvPr>
             <p:ph idx="2" type="sldImg"/>
@@ -3347,7 +3348,106 @@
       </p:sp>
       <p:sp>
         <p:nvSpPr>
-          <p:cNvPr id="276" name="Google Shape;276;g2d7b1fd0d0f_0_10:notes"/>
+          <p:cNvPr id="276" name="Google Shape;276;g2d7b1fd0d0f_0_5:notes"/>
+          <p:cNvSpPr txBox="1"/>
+          <p:nvPr>
+            <p:ph idx="1" type="body"/>
+          </p:nvPr>
+        </p:nvSpPr>
+        <p:spPr>
+          <a:xfrm>
+            <a:off x="685800" y="4343400"/>
+            <a:ext cx="5486400" cy="4114800"/>
+          </a:xfrm>
+          <a:prstGeom prst="rect">
+            <a:avLst/>
+          </a:prstGeom>
+        </p:spPr>
+        <p:txBody>
+          <a:bodyPr anchorCtr="0" anchor="t" bIns="91425" lIns="91425" spcFirstLastPara="1" rIns="91425" wrap="square" tIns="91425">
+            <a:noAutofit/>
+          </a:bodyPr>
+          <a:lstStyle/>
+          <a:p>
+            <a:pPr indent="0" lvl="0" marL="0" rtl="0" algn="l">
+              <a:spcBef>
+                <a:spcPts val="0"/>
+              </a:spcBef>
+              <a:spcAft>
+                <a:spcPts val="0"/>
+              </a:spcAft>
+              <a:buNone/>
+            </a:pPr>
+            <a:r>
+              <a:t/>
+            </a:r>
+            <a:endParaRPr/>
+          </a:p>
+        </p:txBody>
+      </p:sp>
+    </p:spTree>
+  </p:cSld>
+  <p:clrMapOvr>
+    <a:masterClrMapping/>
+  </p:clrMapOvr>
+</p:notes>
+</file>
+
+<file path=ppt/notesSlides/notesSlide34.xml><?xml version="1.0" encoding="utf-8"?>
+<p:notes xmlns:a="http://schemas.openxmlformats.org/drawingml/2006/main" xmlns:r="http://schemas.openxmlformats.org/officeDocument/2006/relationships" xmlns:mc="http://schemas.openxmlformats.org/markup-compatibility/2006" xmlns:mv="urn:schemas-microsoft-com:mac:vml" xmlns:p="http://schemas.openxmlformats.org/presentationml/2006/main" xmlns:c="http://schemas.openxmlformats.org/drawingml/2006/chart" xmlns:dgm="http://schemas.openxmlformats.org/drawingml/2006/diagram" xmlns:o="urn:schemas-microsoft-com:office:office" xmlns:v="urn:schemas-microsoft-com:vml" xmlns:pvml="urn:schemas-microsoft-com:office:powerpoint" xmlns:com="http://schemas.openxmlformats.org/drawingml/2006/compatibility" xmlns:p14="http://schemas.microsoft.com/office/powerpoint/2010/main" xmlns:p15="http://schemas.microsoft.com/office/powerpoint/2012/main" xmlns:ahyp="http://schemas.microsoft.com/office/drawing/2018/hyperlinkcolor" showMasterPhAnim="0" showMasterSp="0">
+  <p:cSld>
+    <p:spTree>
+      <p:nvGrpSpPr>
+        <p:cNvPr id="280" name="Shape 280"/>
+        <p:cNvGrpSpPr/>
+        <p:nvPr/>
+      </p:nvGrpSpPr>
+      <p:grpSpPr>
+        <a:xfrm>
+          <a:off x="0" y="0"/>
+          <a:ext cx="0" cy="0"/>
+          <a:chOff x="0" y="0"/>
+          <a:chExt cx="0" cy="0"/>
+        </a:xfrm>
+      </p:grpSpPr>
+      <p:sp>
+        <p:nvSpPr>
+          <p:cNvPr id="281" name="Google Shape;281;g2d7b1fd0d0f_0_10:notes"/>
+          <p:cNvSpPr/>
+          <p:nvPr>
+            <p:ph idx="2" type="sldImg"/>
+          </p:nvPr>
+        </p:nvSpPr>
+        <p:spPr>
+          <a:xfrm>
+            <a:off x="381300" y="685800"/>
+            <a:ext cx="6096000" cy="3429000"/>
+          </a:xfrm>
+          <a:custGeom>
+            <a:rect b="b" l="l" r="r" t="t"/>
+            <a:pathLst>
+              <a:path extrusionOk="0" h="120000" w="120000">
+                <a:moveTo>
+                  <a:pt x="0" y="0"/>
+                </a:moveTo>
+                <a:lnTo>
+                  <a:pt x="120000" y="0"/>
+                </a:lnTo>
+                <a:lnTo>
+                  <a:pt x="120000" y="120000"/>
+                </a:lnTo>
+                <a:lnTo>
+                  <a:pt x="0" y="120000"/>
+                </a:lnTo>
+                <a:close/>
+              </a:path>
+            </a:pathLst>
+          </a:custGeom>
+        </p:spPr>
+      </p:sp>
+      <p:sp>
+        <p:nvSpPr>
+          <p:cNvPr id="282" name="Google Shape;282;g2d7b1fd0d0f_0_10:notes"/>
           <p:cNvSpPr txBox="1"/>
           <p:nvPr>
             <p:ph idx="1" type="body"/>
@@ -8918,7 +9018,108 @@
             </a:pPr>
             <a:r>
               <a:rPr lang="en"/>
-              <a:t>Questions so far?</a:t>
+              <a:t>Note: I’m </a:t>
+            </a:r>
+            <a:r>
+              <a:rPr lang="en"/>
+              <a:t>assembling</a:t>
+            </a:r>
+            <a:r>
+              <a:rPr lang="en"/>
+              <a:t> some links on research/writing</a:t>
+            </a:r>
+            <a:endParaRPr/>
+          </a:p>
+        </p:txBody>
+      </p:sp>
+      <p:sp>
+        <p:nvSpPr>
+          <p:cNvPr id="109" name="Google Shape;109;p22"/>
+          <p:cNvSpPr txBox="1"/>
+          <p:nvPr>
+            <p:ph idx="1" type="body"/>
+          </p:nvPr>
+        </p:nvSpPr>
+        <p:spPr>
+          <a:xfrm>
+            <a:off x="311700" y="1152475"/>
+            <a:ext cx="8520600" cy="3416400"/>
+          </a:xfrm>
+          <a:prstGeom prst="rect">
+            <a:avLst/>
+          </a:prstGeom>
+        </p:spPr>
+        <p:txBody>
+          <a:bodyPr anchorCtr="0" anchor="t" bIns="91425" lIns="91425" spcFirstLastPara="1" rIns="91425" wrap="square" tIns="91425">
+            <a:normAutofit/>
+          </a:bodyPr>
+          <a:lstStyle/>
+          <a:p>
+            <a:pPr indent="0" lvl="0" marL="0" rtl="0" algn="l">
+              <a:spcBef>
+                <a:spcPts val="0"/>
+              </a:spcBef>
+              <a:spcAft>
+                <a:spcPts val="0"/>
+              </a:spcAft>
+              <a:buNone/>
+            </a:pPr>
+            <a:r>
+              <a:rPr lang="en"/>
+              <a:t>Up to date set of resources here:</a:t>
+            </a:r>
+            <a:endParaRPr/>
+          </a:p>
+          <a:p>
+            <a:pPr indent="0" lvl="0" marL="0" rtl="0" algn="l">
+              <a:spcBef>
+                <a:spcPts val="1200"/>
+              </a:spcBef>
+              <a:spcAft>
+                <a:spcPts val="0"/>
+              </a:spcAft>
+              <a:buNone/>
+            </a:pPr>
+            <a:r>
+              <a:rPr lang="en" u="sng">
+                <a:solidFill>
+                  <a:schemeClr val="hlink"/>
+                </a:solidFill>
+                <a:hlinkClick r:id="rId3"/>
+              </a:rPr>
+              <a:t>https://github.com/bmaitner/Community_ecology_course/blob/main/additional_materials/useful_links.md</a:t>
+            </a:r>
+            <a:endParaRPr/>
+          </a:p>
+          <a:p>
+            <a:pPr indent="0" lvl="0" marL="0" rtl="0" algn="l">
+              <a:spcBef>
+                <a:spcPts val="1200"/>
+              </a:spcBef>
+              <a:spcAft>
+                <a:spcPts val="0"/>
+              </a:spcAft>
+              <a:buNone/>
+            </a:pPr>
+            <a:r>
+              <a:rPr lang="en"/>
+              <a:t>If you’re new to scientific writing and want more help, use office hours</a:t>
+            </a:r>
+            <a:endParaRPr/>
+          </a:p>
+          <a:p>
+            <a:pPr indent="0" lvl="0" marL="0" rtl="0" algn="l">
+              <a:spcBef>
+                <a:spcPts val="1200"/>
+              </a:spcBef>
+              <a:spcAft>
+                <a:spcPts val="1200"/>
+              </a:spcAft>
+              <a:buNone/>
+            </a:pPr>
+            <a:r>
+              <a:rPr lang="en"/>
+              <a:t> </a:t>
             </a:r>
             <a:endParaRPr/>
           </a:p>
@@ -8937,7 +9138,7 @@
   <p:cSld>
     <p:spTree>
       <p:nvGrpSpPr>
-        <p:cNvPr id="112" name="Shape 112"/>
+        <p:cNvPr id="113" name="Shape 113"/>
         <p:cNvGrpSpPr/>
         <p:nvPr/>
       </p:nvGrpSpPr>
@@ -8951,7 +9152,7 @@
       </p:grpSpPr>
       <p:sp>
         <p:nvSpPr>
-          <p:cNvPr id="113" name="Google Shape;113;p23"/>
+          <p:cNvPr id="114" name="Google Shape;114;p23"/>
           <p:cNvSpPr txBox="1"/>
           <p:nvPr>
             <p:ph type="title"/>
@@ -8983,47 +9184,7 @@
             </a:pPr>
             <a:r>
               <a:rPr lang="en"/>
-              <a:t>What is Community Ecology?</a:t>
-            </a:r>
-            <a:endParaRPr/>
-          </a:p>
-        </p:txBody>
-      </p:sp>
-      <p:sp>
-        <p:nvSpPr>
-          <p:cNvPr id="114" name="Google Shape;114;p23"/>
-          <p:cNvSpPr txBox="1"/>
-          <p:nvPr>
-            <p:ph idx="1" type="body"/>
-          </p:nvPr>
-        </p:nvSpPr>
-        <p:spPr>
-          <a:xfrm>
-            <a:off x="311700" y="1152475"/>
-            <a:ext cx="8520600" cy="3416400"/>
-          </a:xfrm>
-          <a:prstGeom prst="rect">
-            <a:avLst/>
-          </a:prstGeom>
-        </p:spPr>
-        <p:txBody>
-          <a:bodyPr anchorCtr="0" anchor="t" bIns="91425" lIns="91425" spcFirstLastPara="1" rIns="91425" wrap="square" tIns="91425">
-            <a:normAutofit/>
-          </a:bodyPr>
-          <a:lstStyle/>
-          <a:p>
-            <a:pPr indent="0" lvl="0" marL="0" rtl="0" algn="l">
-              <a:spcBef>
-                <a:spcPts val="0"/>
-              </a:spcBef>
-              <a:spcAft>
-                <a:spcPts val="1200"/>
-              </a:spcAft>
-              <a:buNone/>
-            </a:pPr>
-            <a:r>
-              <a:rPr lang="en"/>
-              <a:t>“Community ecology is that branch of science focused squarely on understanding Earth’s biodiversity, including the generation, maintenance, and distribution of the diversity of life in space and time.” - Mittelbach and McGill</a:t>
+              <a:t>Questions so far?</a:t>
             </a:r>
             <a:endParaRPr/>
           </a:p>
@@ -9084,11 +9245,6 @@
               <a:spcAft>
                 <a:spcPts val="0"/>
               </a:spcAft>
-              <a:buClr>
-                <a:schemeClr val="dk1"/>
-              </a:buClr>
-              <a:buSzPct val="39285"/>
-              <a:buFont typeface="Arial"/>
               <a:buNone/>
             </a:pPr>
             <a:r>
@@ -9097,21 +9253,6 @@
             </a:r>
             <a:endParaRPr/>
           </a:p>
-          <a:p>
-            <a:pPr indent="0" lvl="0" marL="0" rtl="0" algn="l">
-              <a:spcBef>
-                <a:spcPts val="0"/>
-              </a:spcBef>
-              <a:spcAft>
-                <a:spcPts val="0"/>
-              </a:spcAft>
-              <a:buNone/>
-            </a:pPr>
-            <a:r>
-              <a:t/>
-            </a:r>
-            <a:endParaRPr/>
-          </a:p>
         </p:txBody>
       </p:sp>
       <p:sp>
@@ -9123,9 +9264,9 @@
           </p:nvPr>
         </p:nvSpPr>
         <p:spPr>
-          <a:xfrm rot="-1702657">
-            <a:off x="-420450" y="2238133"/>
-            <a:ext cx="10404800" cy="1028080"/>
+          <a:xfrm>
+            <a:off x="311700" y="1152475"/>
+            <a:ext cx="8520600" cy="3416400"/>
           </a:xfrm>
           <a:prstGeom prst="rect">
             <a:avLst/>
@@ -9147,18 +9288,10 @@
               <a:buNone/>
             </a:pPr>
             <a:r>
-              <a:rPr lang="en" sz="1600"/>
-              <a:t>Molecule &lt; Organelle &lt; Cell &lt; Tissue &lt; Organ &lt; Organism &lt; Population &lt; </a:t>
-            </a:r>
-            <a:r>
-              <a:rPr b="1" lang="en" sz="1600"/>
-              <a:t>Community</a:t>
-            </a:r>
-            <a:r>
-              <a:rPr lang="en" sz="1600"/>
-              <a:t> &lt; Ecosystem &lt; Biosphere</a:t>
-            </a:r>
-            <a:endParaRPr sz="1600"/>
+              <a:rPr lang="en"/>
+              <a:t>“Community ecology is that branch of science focused squarely on understanding Earth’s biodiversity, including the generation, maintenance, and distribution of the diversity of life in space and time.” - Mittelbach and McGill</a:t>
+            </a:r>
+            <a:endParaRPr/>
           </a:p>
         </p:txBody>
       </p:sp>
@@ -9217,6 +9350,11 @@
               <a:spcAft>
                 <a:spcPts val="0"/>
               </a:spcAft>
+              <a:buClr>
+                <a:schemeClr val="dk1"/>
+              </a:buClr>
+              <a:buSzPct val="39285"/>
+              <a:buFont typeface="Arial"/>
               <a:buNone/>
             </a:pPr>
             <a:r>
@@ -9251,9 +9389,9 @@
           </p:nvPr>
         </p:nvSpPr>
         <p:spPr>
-          <a:xfrm>
-            <a:off x="311700" y="1152475"/>
-            <a:ext cx="8520600" cy="3416400"/>
+          <a:xfrm rot="-1702657">
+            <a:off x="-420450" y="2238133"/>
+            <a:ext cx="10404800" cy="1028080"/>
           </a:xfrm>
           <a:prstGeom prst="rect">
             <a:avLst/>
@@ -9270,49 +9408,23 @@
                 <a:spcPts val="0"/>
               </a:spcBef>
               <a:spcAft>
-                <a:spcPts val="0"/>
-              </a:spcAft>
-              <a:buNone/>
-            </a:pPr>
-            <a:r>
-              <a:rPr lang="en"/>
-              <a:t>Science focused on multiple, co-occurring species.</a:t>
-            </a:r>
-            <a:endParaRPr/>
-          </a:p>
-          <a:p>
-            <a:pPr indent="-342900" lvl="0" marL="457200" rtl="0" algn="l">
-              <a:spcBef>
                 <a:spcPts val="1200"/>
-              </a:spcBef>
-              <a:spcAft>
-                <a:spcPts val="0"/>
-              </a:spcAft>
-              <a:buSzPts val="1800"/>
-              <a:buChar char="-"/>
-            </a:pPr>
-            <a:r>
-              <a:rPr lang="en"/>
-              <a:t>Overlaps with other branches of ecology</a:t>
-            </a:r>
-            <a:endParaRPr/>
-          </a:p>
-          <a:p>
-            <a:pPr indent="-342900" lvl="0" marL="457200" rtl="0" algn="l">
-              <a:spcBef>
-                <a:spcPts val="0"/>
-              </a:spcBef>
-              <a:spcAft>
-                <a:spcPts val="0"/>
-              </a:spcAft>
-              <a:buSzPts val="1800"/>
-              <a:buChar char="-"/>
-            </a:pPr>
-            <a:r>
-              <a:rPr lang="en"/>
-              <a:t>Best not to stress over an exact definition</a:t>
-            </a:r>
-            <a:endParaRPr/>
+              </a:spcAft>
+              <a:buNone/>
+            </a:pPr>
+            <a:r>
+              <a:rPr lang="en" sz="1600"/>
+              <a:t>Molecule &lt; Organelle &lt; Cell &lt; Tissue &lt; Organ &lt; Organism &lt; Population &lt; </a:t>
+            </a:r>
+            <a:r>
+              <a:rPr b="1" lang="en" sz="1600"/>
+              <a:t>Community</a:t>
+            </a:r>
+            <a:r>
+              <a:rPr lang="en" sz="1600"/>
+              <a:t> &lt; Ecosystem &lt; Biosphere</a:t>
+            </a:r>
+            <a:endParaRPr sz="1600"/>
           </a:p>
         </p:txBody>
       </p:sp>
@@ -9375,7 +9487,22 @@
             </a:pPr>
             <a:r>
               <a:rPr lang="en"/>
-              <a:t>Why Community Ecology?</a:t>
+              <a:t>What is Community Ecology?</a:t>
+            </a:r>
+            <a:endParaRPr/>
+          </a:p>
+          <a:p>
+            <a:pPr indent="0" lvl="0" marL="0" rtl="0" algn="l">
+              <a:spcBef>
+                <a:spcPts val="0"/>
+              </a:spcBef>
+              <a:spcAft>
+                <a:spcPts val="0"/>
+              </a:spcAft>
+              <a:buNone/>
+            </a:pPr>
+            <a:r>
+              <a:t/>
             </a:r>
             <a:endParaRPr/>
           </a:p>
@@ -9384,39 +9511,27 @@
       <p:sp>
         <p:nvSpPr>
           <p:cNvPr id="132" name="Google Shape;132;p26"/>
-          <p:cNvSpPr/>
-          <p:nvPr/>
-        </p:nvSpPr>
-        <p:spPr>
-          <a:xfrm>
-            <a:off x="3240300" y="2043725"/>
-            <a:ext cx="1542600" cy="887700"/>
-          </a:xfrm>
-          <a:prstGeom prst="roundRect">
-            <a:avLst>
-              <a:gd fmla="val 16667" name="adj"/>
-            </a:avLst>
-          </a:prstGeom>
-          <a:solidFill>
-            <a:srgbClr val="EAD1DC"/>
-          </a:solidFill>
-          <a:ln cap="flat" cmpd="sng" w="9525">
-            <a:solidFill>
-              <a:schemeClr val="dk2"/>
-            </a:solidFill>
-            <a:prstDash val="solid"/>
-            <a:round/>
-            <a:headEnd len="sm" w="sm" type="none"/>
-            <a:tailEnd len="sm" w="sm" type="none"/>
-          </a:ln>
+          <p:cNvSpPr txBox="1"/>
+          <p:nvPr>
+            <p:ph idx="1" type="body"/>
+          </p:nvPr>
+        </p:nvSpPr>
+        <p:spPr>
+          <a:xfrm>
+            <a:off x="311700" y="1152475"/>
+            <a:ext cx="8520600" cy="3416400"/>
+          </a:xfrm>
+          <a:prstGeom prst="rect">
+            <a:avLst/>
+          </a:prstGeom>
         </p:spPr>
         <p:txBody>
-          <a:bodyPr anchorCtr="0" anchor="ctr" bIns="91425" lIns="91425" spcFirstLastPara="1" rIns="91425" wrap="square" tIns="91425">
-            <a:noAutofit/>
+          <a:bodyPr anchorCtr="0" anchor="t" bIns="91425" lIns="91425" spcFirstLastPara="1" rIns="91425" wrap="square" tIns="91425">
+            <a:normAutofit/>
           </a:bodyPr>
           <a:lstStyle/>
           <a:p>
-            <a:pPr indent="0" lvl="0" marL="0" rtl="0" algn="ctr">
+            <a:pPr indent="0" lvl="0" marL="0" rtl="0" algn="l">
               <a:spcBef>
                 <a:spcPts val="0"/>
               </a:spcBef>
@@ -9427,7 +9542,41 @@
             </a:pPr>
             <a:r>
               <a:rPr lang="en"/>
-              <a:t>Community Ecology</a:t>
+              <a:t>Science focused on multiple, co-occurring species.</a:t>
+            </a:r>
+            <a:endParaRPr/>
+          </a:p>
+          <a:p>
+            <a:pPr indent="-342900" lvl="0" marL="457200" rtl="0" algn="l">
+              <a:spcBef>
+                <a:spcPts val="1200"/>
+              </a:spcBef>
+              <a:spcAft>
+                <a:spcPts val="0"/>
+              </a:spcAft>
+              <a:buSzPts val="1800"/>
+              <a:buChar char="-"/>
+            </a:pPr>
+            <a:r>
+              <a:rPr lang="en"/>
+              <a:t>Overlaps with other branches of ecology</a:t>
+            </a:r>
+            <a:endParaRPr/>
+          </a:p>
+          <a:p>
+            <a:pPr indent="-342900" lvl="0" marL="457200" rtl="0" algn="l">
+              <a:spcBef>
+                <a:spcPts val="0"/>
+              </a:spcBef>
+              <a:spcAft>
+                <a:spcPts val="0"/>
+              </a:spcAft>
+              <a:buSzPts val="1800"/>
+              <a:buChar char="-"/>
+            </a:pPr>
+            <a:r>
+              <a:rPr lang="en"/>
+              <a:t>Best not to stress over an exact definition</a:t>
             </a:r>
             <a:endParaRPr/>
           </a:p>
@@ -9550,110 +9699,6 @@
           </a:p>
         </p:txBody>
       </p:sp>
-      <p:sp>
-        <p:nvSpPr>
-          <p:cNvPr id="139" name="Google Shape;139;p27"/>
-          <p:cNvSpPr/>
-          <p:nvPr/>
-        </p:nvSpPr>
-        <p:spPr>
-          <a:xfrm>
-            <a:off x="1518450" y="2071450"/>
-            <a:ext cx="1266900" cy="860100"/>
-          </a:xfrm>
-          <a:prstGeom prst="roundRect">
-            <a:avLst>
-              <a:gd fmla="val 16667" name="adj"/>
-            </a:avLst>
-          </a:prstGeom>
-          <a:solidFill>
-            <a:schemeClr val="lt2"/>
-          </a:solidFill>
-          <a:ln cap="flat" cmpd="sng" w="9525">
-            <a:solidFill>
-              <a:schemeClr val="dk2"/>
-            </a:solidFill>
-            <a:prstDash val="solid"/>
-            <a:round/>
-            <a:headEnd len="sm" w="sm" type="none"/>
-            <a:tailEnd len="sm" w="sm" type="none"/>
-          </a:ln>
-        </p:spPr>
-        <p:txBody>
-          <a:bodyPr anchorCtr="0" anchor="ctr" bIns="91425" lIns="91425" spcFirstLastPara="1" rIns="91425" wrap="square" tIns="91425">
-            <a:noAutofit/>
-          </a:bodyPr>
-          <a:lstStyle/>
-          <a:p>
-            <a:pPr indent="0" lvl="0" marL="0" rtl="0" algn="ctr">
-              <a:spcBef>
-                <a:spcPts val="0"/>
-              </a:spcBef>
-              <a:spcAft>
-                <a:spcPts val="0"/>
-              </a:spcAft>
-              <a:buNone/>
-            </a:pPr>
-            <a:r>
-              <a:rPr lang="en"/>
-              <a:t>Population dynamics</a:t>
-            </a:r>
-            <a:endParaRPr/>
-          </a:p>
-        </p:txBody>
-      </p:sp>
-      <p:sp>
-        <p:nvSpPr>
-          <p:cNvPr id="140" name="Google Shape;140;p27"/>
-          <p:cNvSpPr/>
-          <p:nvPr/>
-        </p:nvSpPr>
-        <p:spPr>
-          <a:xfrm>
-            <a:off x="5099850" y="2071450"/>
-            <a:ext cx="1266900" cy="860100"/>
-          </a:xfrm>
-          <a:prstGeom prst="roundRect">
-            <a:avLst>
-              <a:gd fmla="val 16667" name="adj"/>
-            </a:avLst>
-          </a:prstGeom>
-          <a:solidFill>
-            <a:schemeClr val="lt2"/>
-          </a:solidFill>
-          <a:ln cap="flat" cmpd="sng" w="9525">
-            <a:solidFill>
-              <a:schemeClr val="dk2"/>
-            </a:solidFill>
-            <a:prstDash val="solid"/>
-            <a:round/>
-            <a:headEnd len="sm" w="sm" type="none"/>
-            <a:tailEnd len="sm" w="sm" type="none"/>
-          </a:ln>
-        </p:spPr>
-        <p:txBody>
-          <a:bodyPr anchorCtr="0" anchor="ctr" bIns="91425" lIns="91425" spcFirstLastPara="1" rIns="91425" wrap="square" tIns="91425">
-            <a:noAutofit/>
-          </a:bodyPr>
-          <a:lstStyle/>
-          <a:p>
-            <a:pPr indent="0" lvl="0" marL="0" rtl="0" algn="ctr">
-              <a:spcBef>
-                <a:spcPts val="0"/>
-              </a:spcBef>
-              <a:spcAft>
-                <a:spcPts val="0"/>
-              </a:spcAft>
-              <a:buNone/>
-            </a:pPr>
-            <a:r>
-              <a:rPr lang="en"/>
-              <a:t>Ecosystem Functioning</a:t>
-            </a:r>
-            <a:endParaRPr/>
-          </a:p>
-        </p:txBody>
-      </p:sp>
     </p:spTree>
   </p:cSld>
   <p:clrMapOvr>
@@ -9667,7 +9712,7 @@
   <p:cSld>
     <p:spTree>
       <p:nvGrpSpPr>
-        <p:cNvPr id="144" name="Shape 144"/>
+        <p:cNvPr id="142" name="Shape 142"/>
         <p:cNvGrpSpPr/>
         <p:nvPr/>
       </p:nvGrpSpPr>
@@ -9681,7 +9726,7 @@
       </p:grpSpPr>
       <p:sp>
         <p:nvSpPr>
-          <p:cNvPr id="145" name="Google Shape;145;p28"/>
+          <p:cNvPr id="143" name="Google Shape;143;p28"/>
           <p:cNvSpPr txBox="1"/>
           <p:nvPr>
             <p:ph type="title"/>
@@ -9721,7 +9766,7 @@
       </p:sp>
       <p:sp>
         <p:nvSpPr>
-          <p:cNvPr id="146" name="Google Shape;146;p28"/>
+          <p:cNvPr id="144" name="Google Shape;144;p28"/>
           <p:cNvSpPr/>
           <p:nvPr/>
         </p:nvSpPr>
@@ -9773,7 +9818,7 @@
       </p:sp>
       <p:sp>
         <p:nvSpPr>
-          <p:cNvPr id="147" name="Google Shape;147;p28"/>
+          <p:cNvPr id="145" name="Google Shape;145;p28"/>
           <p:cNvSpPr/>
           <p:nvPr/>
         </p:nvSpPr>
@@ -9825,7 +9870,7 @@
       </p:sp>
       <p:sp>
         <p:nvSpPr>
-          <p:cNvPr id="148" name="Google Shape;148;p28"/>
+          <p:cNvPr id="146" name="Google Shape;146;p28"/>
           <p:cNvSpPr/>
           <p:nvPr/>
         </p:nvSpPr>
@@ -9870,162 +9915,6 @@
             <a:r>
               <a:rPr lang="en"/>
               <a:t>Ecosystem Functioning</a:t>
-            </a:r>
-            <a:endParaRPr/>
-          </a:p>
-        </p:txBody>
-      </p:sp>
-      <p:sp>
-        <p:nvSpPr>
-          <p:cNvPr id="149" name="Google Shape;149;p28"/>
-          <p:cNvSpPr/>
-          <p:nvPr/>
-        </p:nvSpPr>
-        <p:spPr>
-          <a:xfrm>
-            <a:off x="2073200" y="1128200"/>
-            <a:ext cx="1368600" cy="693600"/>
-          </a:xfrm>
-          <a:prstGeom prst="roundRect">
-            <a:avLst>
-              <a:gd fmla="val 16667" name="adj"/>
-            </a:avLst>
-          </a:prstGeom>
-          <a:solidFill>
-            <a:schemeClr val="lt2"/>
-          </a:solidFill>
-          <a:ln cap="flat" cmpd="sng" w="9525">
-            <a:solidFill>
-              <a:schemeClr val="dk2"/>
-            </a:solidFill>
-            <a:prstDash val="solid"/>
-            <a:round/>
-            <a:headEnd len="sm" w="sm" type="none"/>
-            <a:tailEnd len="sm" w="sm" type="none"/>
-          </a:ln>
-        </p:spPr>
-        <p:txBody>
-          <a:bodyPr anchorCtr="0" anchor="ctr" bIns="91425" lIns="91425" spcFirstLastPara="1" rIns="91425" wrap="square" tIns="91425">
-            <a:noAutofit/>
-          </a:bodyPr>
-          <a:lstStyle/>
-          <a:p>
-            <a:pPr indent="0" lvl="0" marL="0" rtl="0" algn="ctr">
-              <a:spcBef>
-                <a:spcPts val="0"/>
-              </a:spcBef>
-              <a:spcAft>
-                <a:spcPts val="0"/>
-              </a:spcAft>
-              <a:buNone/>
-            </a:pPr>
-            <a:r>
-              <a:rPr lang="en"/>
-              <a:t>Conservation</a:t>
-            </a:r>
-            <a:endParaRPr/>
-          </a:p>
-        </p:txBody>
-      </p:sp>
-      <p:sp>
-        <p:nvSpPr>
-          <p:cNvPr id="150" name="Google Shape;150;p28"/>
-          <p:cNvSpPr/>
-          <p:nvPr/>
-        </p:nvSpPr>
-        <p:spPr>
-          <a:xfrm>
-            <a:off x="244400" y="1128200"/>
-            <a:ext cx="1368600" cy="693600"/>
-          </a:xfrm>
-          <a:prstGeom prst="roundRect">
-            <a:avLst>
-              <a:gd fmla="val 16667" name="adj"/>
-            </a:avLst>
-          </a:prstGeom>
-          <a:solidFill>
-            <a:schemeClr val="lt2"/>
-          </a:solidFill>
-          <a:ln cap="flat" cmpd="sng" w="9525">
-            <a:solidFill>
-              <a:schemeClr val="dk2"/>
-            </a:solidFill>
-            <a:prstDash val="solid"/>
-            <a:round/>
-            <a:headEnd len="sm" w="sm" type="none"/>
-            <a:tailEnd len="sm" w="sm" type="none"/>
-          </a:ln>
-        </p:spPr>
-        <p:txBody>
-          <a:bodyPr anchorCtr="0" anchor="ctr" bIns="91425" lIns="91425" spcFirstLastPara="1" rIns="91425" wrap="square" tIns="91425">
-            <a:noAutofit/>
-          </a:bodyPr>
-          <a:lstStyle/>
-          <a:p>
-            <a:pPr indent="0" lvl="0" marL="0" rtl="0" algn="ctr">
-              <a:spcBef>
-                <a:spcPts val="0"/>
-              </a:spcBef>
-              <a:spcAft>
-                <a:spcPts val="0"/>
-              </a:spcAft>
-              <a:buNone/>
-            </a:pPr>
-            <a:r>
-              <a:rPr lang="en"/>
-              <a:t>Evolution</a:t>
-            </a:r>
-            <a:endParaRPr/>
-          </a:p>
-        </p:txBody>
-      </p:sp>
-      <p:sp>
-        <p:nvSpPr>
-          <p:cNvPr id="151" name="Google Shape;151;p28"/>
-          <p:cNvSpPr/>
-          <p:nvPr/>
-        </p:nvSpPr>
-        <p:spPr>
-          <a:xfrm>
-            <a:off x="244400" y="3185600"/>
-            <a:ext cx="1368600" cy="693600"/>
-          </a:xfrm>
-          <a:prstGeom prst="roundRect">
-            <a:avLst>
-              <a:gd fmla="val 16667" name="adj"/>
-            </a:avLst>
-          </a:prstGeom>
-          <a:solidFill>
-            <a:schemeClr val="lt2"/>
-          </a:solidFill>
-          <a:ln cap="flat" cmpd="sng" w="9525">
-            <a:solidFill>
-              <a:schemeClr val="dk2"/>
-            </a:solidFill>
-            <a:prstDash val="solid"/>
-            <a:round/>
-            <a:headEnd len="sm" w="sm" type="none"/>
-            <a:tailEnd len="sm" w="sm" type="none"/>
-          </a:ln>
-        </p:spPr>
-        <p:txBody>
-          <a:bodyPr anchorCtr="0" anchor="ctr" bIns="91425" lIns="91425" spcFirstLastPara="1" rIns="91425" wrap="square" tIns="91425">
-            <a:noAutofit/>
-          </a:bodyPr>
-          <a:lstStyle/>
-          <a:p>
-            <a:pPr indent="0" lvl="0" marL="0" rtl="0" algn="ctr">
-              <a:spcBef>
-                <a:spcPts val="0"/>
-              </a:spcBef>
-              <a:spcAft>
-                <a:spcPts val="0"/>
-              </a:spcAft>
-              <a:buNone/>
-            </a:pPr>
-            <a:r>
-              <a:rPr lang="en"/>
-              <a:t>Behavior</a:t>
             </a:r>
             <a:endParaRPr/>
           </a:p>
@@ -10044,7 +9933,7 @@
   <p:cSld>
     <p:spTree>
       <p:nvGrpSpPr>
-        <p:cNvPr id="155" name="Shape 155"/>
+        <p:cNvPr id="150" name="Shape 150"/>
         <p:cNvGrpSpPr/>
         <p:nvPr/>
       </p:nvGrpSpPr>
@@ -10058,7 +9947,7 @@
       </p:grpSpPr>
       <p:sp>
         <p:nvSpPr>
-          <p:cNvPr id="156" name="Google Shape;156;p29"/>
+          <p:cNvPr id="151" name="Google Shape;151;p29"/>
           <p:cNvSpPr txBox="1"/>
           <p:nvPr>
             <p:ph type="title"/>
@@ -10098,7 +9987,7 @@
       </p:sp>
       <p:sp>
         <p:nvSpPr>
-          <p:cNvPr id="157" name="Google Shape;157;p29"/>
+          <p:cNvPr id="152" name="Google Shape;152;p29"/>
           <p:cNvSpPr/>
           <p:nvPr/>
         </p:nvSpPr>
@@ -10150,7 +10039,7 @@
       </p:sp>
       <p:sp>
         <p:nvSpPr>
-          <p:cNvPr id="158" name="Google Shape;158;p29"/>
+          <p:cNvPr id="153" name="Google Shape;153;p29"/>
           <p:cNvSpPr/>
           <p:nvPr/>
         </p:nvSpPr>
@@ -10202,7 +10091,7 @@
       </p:sp>
       <p:sp>
         <p:nvSpPr>
-          <p:cNvPr id="159" name="Google Shape;159;p29"/>
+          <p:cNvPr id="154" name="Google Shape;154;p29"/>
           <p:cNvSpPr/>
           <p:nvPr/>
         </p:nvSpPr>
@@ -10254,7 +10143,7 @@
       </p:sp>
       <p:sp>
         <p:nvSpPr>
-          <p:cNvPr id="160" name="Google Shape;160;p29"/>
+          <p:cNvPr id="155" name="Google Shape;155;p29"/>
           <p:cNvSpPr/>
           <p:nvPr/>
         </p:nvSpPr>
@@ -10306,13 +10195,13 @@
       </p:sp>
       <p:sp>
         <p:nvSpPr>
-          <p:cNvPr id="161" name="Google Shape;161;p29"/>
+          <p:cNvPr id="156" name="Google Shape;156;p29"/>
           <p:cNvSpPr/>
           <p:nvPr/>
         </p:nvSpPr>
         <p:spPr>
           <a:xfrm>
-            <a:off x="4054400" y="1128200"/>
+            <a:off x="244400" y="1128200"/>
             <a:ext cx="1368600" cy="693600"/>
           </a:xfrm>
           <a:prstGeom prst="roundRect">
@@ -10350,7 +10239,7 @@
             </a:pPr>
             <a:r>
               <a:rPr lang="en"/>
-              <a:t>Human health</a:t>
+              <a:t>Evolution</a:t>
             </a:r>
             <a:endParaRPr/>
           </a:p>
@@ -10358,267 +10247,7 @@
       </p:sp>
       <p:sp>
         <p:nvSpPr>
-          <p:cNvPr id="162" name="Google Shape;162;p29"/>
-          <p:cNvSpPr/>
-          <p:nvPr/>
-        </p:nvSpPr>
-        <p:spPr>
-          <a:xfrm>
-            <a:off x="4206800" y="3185600"/>
-            <a:ext cx="1368600" cy="693600"/>
-          </a:xfrm>
-          <a:prstGeom prst="roundRect">
-            <a:avLst>
-              <a:gd fmla="val 16667" name="adj"/>
-            </a:avLst>
-          </a:prstGeom>
-          <a:solidFill>
-            <a:schemeClr val="lt2"/>
-          </a:solidFill>
-          <a:ln cap="flat" cmpd="sng" w="9525">
-            <a:solidFill>
-              <a:schemeClr val="dk2"/>
-            </a:solidFill>
-            <a:prstDash val="solid"/>
-            <a:round/>
-            <a:headEnd len="sm" w="sm" type="none"/>
-            <a:tailEnd len="sm" w="sm" type="none"/>
-          </a:ln>
-        </p:spPr>
-        <p:txBody>
-          <a:bodyPr anchorCtr="0" anchor="ctr" bIns="91425" lIns="91425" spcFirstLastPara="1" rIns="91425" wrap="square" tIns="91425">
-            <a:noAutofit/>
-          </a:bodyPr>
-          <a:lstStyle/>
-          <a:p>
-            <a:pPr indent="0" lvl="0" marL="0" rtl="0" algn="ctr">
-              <a:spcBef>
-                <a:spcPts val="0"/>
-              </a:spcBef>
-              <a:spcAft>
-                <a:spcPts val="0"/>
-              </a:spcAft>
-              <a:buNone/>
-            </a:pPr>
-            <a:r>
-              <a:rPr lang="en"/>
-              <a:t>Anthropology</a:t>
-            </a:r>
-            <a:endParaRPr/>
-          </a:p>
-        </p:txBody>
-      </p:sp>
-      <p:sp>
-        <p:nvSpPr>
-          <p:cNvPr id="163" name="Google Shape;163;p29"/>
-          <p:cNvSpPr/>
-          <p:nvPr/>
-        </p:nvSpPr>
-        <p:spPr>
-          <a:xfrm>
-            <a:off x="2301800" y="3185600"/>
-            <a:ext cx="1368600" cy="693600"/>
-          </a:xfrm>
-          <a:prstGeom prst="roundRect">
-            <a:avLst>
-              <a:gd fmla="val 16667" name="adj"/>
-            </a:avLst>
-          </a:prstGeom>
-          <a:solidFill>
-            <a:schemeClr val="lt2"/>
-          </a:solidFill>
-          <a:ln cap="flat" cmpd="sng" w="9525">
-            <a:solidFill>
-              <a:schemeClr val="dk2"/>
-            </a:solidFill>
-            <a:prstDash val="solid"/>
-            <a:round/>
-            <a:headEnd len="sm" w="sm" type="none"/>
-            <a:tailEnd len="sm" w="sm" type="none"/>
-          </a:ln>
-        </p:spPr>
-        <p:txBody>
-          <a:bodyPr anchorCtr="0" anchor="ctr" bIns="91425" lIns="91425" spcFirstLastPara="1" rIns="91425" wrap="square" tIns="91425">
-            <a:noAutofit/>
-          </a:bodyPr>
-          <a:lstStyle/>
-          <a:p>
-            <a:pPr indent="0" lvl="0" marL="0" rtl="0" algn="ctr">
-              <a:spcBef>
-                <a:spcPts val="0"/>
-              </a:spcBef>
-              <a:spcAft>
-                <a:spcPts val="0"/>
-              </a:spcAft>
-              <a:buNone/>
-            </a:pPr>
-            <a:r>
-              <a:rPr lang="en"/>
-              <a:t>Business</a:t>
-            </a:r>
-            <a:endParaRPr/>
-          </a:p>
-        </p:txBody>
-      </p:sp>
-      <p:sp>
-        <p:nvSpPr>
-          <p:cNvPr id="164" name="Google Shape;164;p29"/>
-          <p:cNvSpPr/>
-          <p:nvPr/>
-        </p:nvSpPr>
-        <p:spPr>
-          <a:xfrm>
-            <a:off x="5807000" y="1128200"/>
-            <a:ext cx="1368600" cy="693600"/>
-          </a:xfrm>
-          <a:prstGeom prst="roundRect">
-            <a:avLst>
-              <a:gd fmla="val 16667" name="adj"/>
-            </a:avLst>
-          </a:prstGeom>
-          <a:solidFill>
-            <a:schemeClr val="lt2"/>
-          </a:solidFill>
-          <a:ln cap="flat" cmpd="sng" w="9525">
-            <a:solidFill>
-              <a:schemeClr val="dk2"/>
-            </a:solidFill>
-            <a:prstDash val="solid"/>
-            <a:round/>
-            <a:headEnd len="sm" w="sm" type="none"/>
-            <a:tailEnd len="sm" w="sm" type="none"/>
-          </a:ln>
-        </p:spPr>
-        <p:txBody>
-          <a:bodyPr anchorCtr="0" anchor="ctr" bIns="91425" lIns="91425" spcFirstLastPara="1" rIns="91425" wrap="square" tIns="91425">
-            <a:noAutofit/>
-          </a:bodyPr>
-          <a:lstStyle/>
-          <a:p>
-            <a:pPr indent="0" lvl="0" marL="0" rtl="0" algn="ctr">
-              <a:spcBef>
-                <a:spcPts val="0"/>
-              </a:spcBef>
-              <a:spcAft>
-                <a:spcPts val="0"/>
-              </a:spcAft>
-              <a:buNone/>
-            </a:pPr>
-            <a:r>
-              <a:rPr lang="en"/>
-              <a:t>Agriculture</a:t>
-            </a:r>
-            <a:endParaRPr/>
-          </a:p>
-        </p:txBody>
-      </p:sp>
-      <p:sp>
-        <p:nvSpPr>
-          <p:cNvPr id="165" name="Google Shape;165;p29"/>
-          <p:cNvSpPr/>
-          <p:nvPr/>
-        </p:nvSpPr>
-        <p:spPr>
-          <a:xfrm>
-            <a:off x="6111800" y="3109400"/>
-            <a:ext cx="1368600" cy="693600"/>
-          </a:xfrm>
-          <a:prstGeom prst="roundRect">
-            <a:avLst>
-              <a:gd fmla="val 16667" name="adj"/>
-            </a:avLst>
-          </a:prstGeom>
-          <a:solidFill>
-            <a:schemeClr val="lt2"/>
-          </a:solidFill>
-          <a:ln cap="flat" cmpd="sng" w="9525">
-            <a:solidFill>
-              <a:schemeClr val="dk2"/>
-            </a:solidFill>
-            <a:prstDash val="solid"/>
-            <a:round/>
-            <a:headEnd len="sm" w="sm" type="none"/>
-            <a:tailEnd len="sm" w="sm" type="none"/>
-          </a:ln>
-        </p:spPr>
-        <p:txBody>
-          <a:bodyPr anchorCtr="0" anchor="ctr" bIns="91425" lIns="91425" spcFirstLastPara="1" rIns="91425" wrap="square" tIns="91425">
-            <a:noAutofit/>
-          </a:bodyPr>
-          <a:lstStyle/>
-          <a:p>
-            <a:pPr indent="0" lvl="0" marL="0" rtl="0" algn="ctr">
-              <a:spcBef>
-                <a:spcPts val="0"/>
-              </a:spcBef>
-              <a:spcAft>
-                <a:spcPts val="0"/>
-              </a:spcAft>
-              <a:buNone/>
-            </a:pPr>
-            <a:r>
-              <a:rPr lang="en"/>
-              <a:t>Climate Models</a:t>
-            </a:r>
-            <a:endParaRPr/>
-          </a:p>
-        </p:txBody>
-      </p:sp>
-      <p:sp>
-        <p:nvSpPr>
-          <p:cNvPr id="166" name="Google Shape;166;p29"/>
-          <p:cNvSpPr/>
-          <p:nvPr/>
-        </p:nvSpPr>
-        <p:spPr>
-          <a:xfrm>
-            <a:off x="244400" y="1128200"/>
-            <a:ext cx="1368600" cy="693600"/>
-          </a:xfrm>
-          <a:prstGeom prst="roundRect">
-            <a:avLst>
-              <a:gd fmla="val 16667" name="adj"/>
-            </a:avLst>
-          </a:prstGeom>
-          <a:solidFill>
-            <a:schemeClr val="lt2"/>
-          </a:solidFill>
-          <a:ln cap="flat" cmpd="sng" w="9525">
-            <a:solidFill>
-              <a:schemeClr val="dk2"/>
-            </a:solidFill>
-            <a:prstDash val="solid"/>
-            <a:round/>
-            <a:headEnd len="sm" w="sm" type="none"/>
-            <a:tailEnd len="sm" w="sm" type="none"/>
-          </a:ln>
-        </p:spPr>
-        <p:txBody>
-          <a:bodyPr anchorCtr="0" anchor="ctr" bIns="91425" lIns="91425" spcFirstLastPara="1" rIns="91425" wrap="square" tIns="91425">
-            <a:noAutofit/>
-          </a:bodyPr>
-          <a:lstStyle/>
-          <a:p>
-            <a:pPr indent="0" lvl="0" marL="0" rtl="0" algn="ctr">
-              <a:spcBef>
-                <a:spcPts val="0"/>
-              </a:spcBef>
-              <a:spcAft>
-                <a:spcPts val="0"/>
-              </a:spcAft>
-              <a:buNone/>
-            </a:pPr>
-            <a:r>
-              <a:rPr lang="en"/>
-              <a:t>Evolution</a:t>
-            </a:r>
-            <a:endParaRPr/>
-          </a:p>
-        </p:txBody>
-      </p:sp>
-      <p:sp>
-        <p:nvSpPr>
-          <p:cNvPr id="167" name="Google Shape;167;p29"/>
+          <p:cNvPr id="157" name="Google Shape;157;p29"/>
           <p:cNvSpPr/>
           <p:nvPr/>
         </p:nvSpPr>
@@ -10681,7 +10310,7 @@
   <p:cSld>
     <p:spTree>
       <p:nvGrpSpPr>
-        <p:cNvPr id="171" name="Shape 171"/>
+        <p:cNvPr id="161" name="Shape 161"/>
         <p:cNvGrpSpPr/>
         <p:nvPr/>
       </p:nvGrpSpPr>
@@ -10695,7 +10324,7 @@
       </p:grpSpPr>
       <p:sp>
         <p:nvSpPr>
-          <p:cNvPr id="172" name="Google Shape;172;p30"/>
+          <p:cNvPr id="162" name="Google Shape;162;p30"/>
           <p:cNvSpPr txBox="1"/>
           <p:nvPr>
             <p:ph type="title"/>
@@ -10727,7 +10356,579 @@
             </a:pPr>
             <a:r>
               <a:rPr lang="en"/>
-              <a:t>Questions?</a:t>
+              <a:t>Why Community Ecology?</a:t>
+            </a:r>
+            <a:endParaRPr/>
+          </a:p>
+        </p:txBody>
+      </p:sp>
+      <p:sp>
+        <p:nvSpPr>
+          <p:cNvPr id="163" name="Google Shape;163;p30"/>
+          <p:cNvSpPr/>
+          <p:nvPr/>
+        </p:nvSpPr>
+        <p:spPr>
+          <a:xfrm>
+            <a:off x="3240300" y="2043725"/>
+            <a:ext cx="1542600" cy="887700"/>
+          </a:xfrm>
+          <a:prstGeom prst="roundRect">
+            <a:avLst>
+              <a:gd fmla="val 16667" name="adj"/>
+            </a:avLst>
+          </a:prstGeom>
+          <a:solidFill>
+            <a:srgbClr val="EAD1DC"/>
+          </a:solidFill>
+          <a:ln cap="flat" cmpd="sng" w="9525">
+            <a:solidFill>
+              <a:schemeClr val="dk2"/>
+            </a:solidFill>
+            <a:prstDash val="solid"/>
+            <a:round/>
+            <a:headEnd len="sm" w="sm" type="none"/>
+            <a:tailEnd len="sm" w="sm" type="none"/>
+          </a:ln>
+        </p:spPr>
+        <p:txBody>
+          <a:bodyPr anchorCtr="0" anchor="ctr" bIns="91425" lIns="91425" spcFirstLastPara="1" rIns="91425" wrap="square" tIns="91425">
+            <a:noAutofit/>
+          </a:bodyPr>
+          <a:lstStyle/>
+          <a:p>
+            <a:pPr indent="0" lvl="0" marL="0" rtl="0" algn="ctr">
+              <a:spcBef>
+                <a:spcPts val="0"/>
+              </a:spcBef>
+              <a:spcAft>
+                <a:spcPts val="0"/>
+              </a:spcAft>
+              <a:buNone/>
+            </a:pPr>
+            <a:r>
+              <a:rPr lang="en"/>
+              <a:t>Community Ecology</a:t>
+            </a:r>
+            <a:endParaRPr/>
+          </a:p>
+        </p:txBody>
+      </p:sp>
+      <p:sp>
+        <p:nvSpPr>
+          <p:cNvPr id="164" name="Google Shape;164;p30"/>
+          <p:cNvSpPr/>
+          <p:nvPr/>
+        </p:nvSpPr>
+        <p:spPr>
+          <a:xfrm>
+            <a:off x="1518450" y="2071450"/>
+            <a:ext cx="1266900" cy="860100"/>
+          </a:xfrm>
+          <a:prstGeom prst="roundRect">
+            <a:avLst>
+              <a:gd fmla="val 16667" name="adj"/>
+            </a:avLst>
+          </a:prstGeom>
+          <a:solidFill>
+            <a:schemeClr val="lt2"/>
+          </a:solidFill>
+          <a:ln cap="flat" cmpd="sng" w="9525">
+            <a:solidFill>
+              <a:schemeClr val="dk2"/>
+            </a:solidFill>
+            <a:prstDash val="solid"/>
+            <a:round/>
+            <a:headEnd len="sm" w="sm" type="none"/>
+            <a:tailEnd len="sm" w="sm" type="none"/>
+          </a:ln>
+        </p:spPr>
+        <p:txBody>
+          <a:bodyPr anchorCtr="0" anchor="ctr" bIns="91425" lIns="91425" spcFirstLastPara="1" rIns="91425" wrap="square" tIns="91425">
+            <a:noAutofit/>
+          </a:bodyPr>
+          <a:lstStyle/>
+          <a:p>
+            <a:pPr indent="0" lvl="0" marL="0" rtl="0" algn="ctr">
+              <a:spcBef>
+                <a:spcPts val="0"/>
+              </a:spcBef>
+              <a:spcAft>
+                <a:spcPts val="0"/>
+              </a:spcAft>
+              <a:buNone/>
+            </a:pPr>
+            <a:r>
+              <a:rPr lang="en"/>
+              <a:t>Population dynamics</a:t>
+            </a:r>
+            <a:endParaRPr/>
+          </a:p>
+        </p:txBody>
+      </p:sp>
+      <p:sp>
+        <p:nvSpPr>
+          <p:cNvPr id="165" name="Google Shape;165;p30"/>
+          <p:cNvSpPr/>
+          <p:nvPr/>
+        </p:nvSpPr>
+        <p:spPr>
+          <a:xfrm>
+            <a:off x="5099850" y="2071450"/>
+            <a:ext cx="1266900" cy="860100"/>
+          </a:xfrm>
+          <a:prstGeom prst="roundRect">
+            <a:avLst>
+              <a:gd fmla="val 16667" name="adj"/>
+            </a:avLst>
+          </a:prstGeom>
+          <a:solidFill>
+            <a:schemeClr val="lt2"/>
+          </a:solidFill>
+          <a:ln cap="flat" cmpd="sng" w="9525">
+            <a:solidFill>
+              <a:schemeClr val="dk2"/>
+            </a:solidFill>
+            <a:prstDash val="solid"/>
+            <a:round/>
+            <a:headEnd len="sm" w="sm" type="none"/>
+            <a:tailEnd len="sm" w="sm" type="none"/>
+          </a:ln>
+        </p:spPr>
+        <p:txBody>
+          <a:bodyPr anchorCtr="0" anchor="ctr" bIns="91425" lIns="91425" spcFirstLastPara="1" rIns="91425" wrap="square" tIns="91425">
+            <a:noAutofit/>
+          </a:bodyPr>
+          <a:lstStyle/>
+          <a:p>
+            <a:pPr indent="0" lvl="0" marL="0" rtl="0" algn="ctr">
+              <a:spcBef>
+                <a:spcPts val="0"/>
+              </a:spcBef>
+              <a:spcAft>
+                <a:spcPts val="0"/>
+              </a:spcAft>
+              <a:buNone/>
+            </a:pPr>
+            <a:r>
+              <a:rPr lang="en"/>
+              <a:t>Ecosystem Functioning</a:t>
+            </a:r>
+            <a:endParaRPr/>
+          </a:p>
+        </p:txBody>
+      </p:sp>
+      <p:sp>
+        <p:nvSpPr>
+          <p:cNvPr id="166" name="Google Shape;166;p30"/>
+          <p:cNvSpPr/>
+          <p:nvPr/>
+        </p:nvSpPr>
+        <p:spPr>
+          <a:xfrm>
+            <a:off x="2073200" y="1128200"/>
+            <a:ext cx="1368600" cy="693600"/>
+          </a:xfrm>
+          <a:prstGeom prst="roundRect">
+            <a:avLst>
+              <a:gd fmla="val 16667" name="adj"/>
+            </a:avLst>
+          </a:prstGeom>
+          <a:solidFill>
+            <a:schemeClr val="lt2"/>
+          </a:solidFill>
+          <a:ln cap="flat" cmpd="sng" w="9525">
+            <a:solidFill>
+              <a:schemeClr val="dk2"/>
+            </a:solidFill>
+            <a:prstDash val="solid"/>
+            <a:round/>
+            <a:headEnd len="sm" w="sm" type="none"/>
+            <a:tailEnd len="sm" w="sm" type="none"/>
+          </a:ln>
+        </p:spPr>
+        <p:txBody>
+          <a:bodyPr anchorCtr="0" anchor="ctr" bIns="91425" lIns="91425" spcFirstLastPara="1" rIns="91425" wrap="square" tIns="91425">
+            <a:noAutofit/>
+          </a:bodyPr>
+          <a:lstStyle/>
+          <a:p>
+            <a:pPr indent="0" lvl="0" marL="0" rtl="0" algn="ctr">
+              <a:spcBef>
+                <a:spcPts val="0"/>
+              </a:spcBef>
+              <a:spcAft>
+                <a:spcPts val="0"/>
+              </a:spcAft>
+              <a:buNone/>
+            </a:pPr>
+            <a:r>
+              <a:rPr lang="en"/>
+              <a:t>Conservation</a:t>
+            </a:r>
+            <a:endParaRPr/>
+          </a:p>
+        </p:txBody>
+      </p:sp>
+      <p:sp>
+        <p:nvSpPr>
+          <p:cNvPr id="167" name="Google Shape;167;p30"/>
+          <p:cNvSpPr/>
+          <p:nvPr/>
+        </p:nvSpPr>
+        <p:spPr>
+          <a:xfrm>
+            <a:off x="4054400" y="1128200"/>
+            <a:ext cx="1368600" cy="693600"/>
+          </a:xfrm>
+          <a:prstGeom prst="roundRect">
+            <a:avLst>
+              <a:gd fmla="val 16667" name="adj"/>
+            </a:avLst>
+          </a:prstGeom>
+          <a:solidFill>
+            <a:schemeClr val="lt2"/>
+          </a:solidFill>
+          <a:ln cap="flat" cmpd="sng" w="9525">
+            <a:solidFill>
+              <a:schemeClr val="dk2"/>
+            </a:solidFill>
+            <a:prstDash val="solid"/>
+            <a:round/>
+            <a:headEnd len="sm" w="sm" type="none"/>
+            <a:tailEnd len="sm" w="sm" type="none"/>
+          </a:ln>
+        </p:spPr>
+        <p:txBody>
+          <a:bodyPr anchorCtr="0" anchor="ctr" bIns="91425" lIns="91425" spcFirstLastPara="1" rIns="91425" wrap="square" tIns="91425">
+            <a:noAutofit/>
+          </a:bodyPr>
+          <a:lstStyle/>
+          <a:p>
+            <a:pPr indent="0" lvl="0" marL="0" rtl="0" algn="ctr">
+              <a:spcBef>
+                <a:spcPts val="0"/>
+              </a:spcBef>
+              <a:spcAft>
+                <a:spcPts val="0"/>
+              </a:spcAft>
+              <a:buNone/>
+            </a:pPr>
+            <a:r>
+              <a:rPr lang="en"/>
+              <a:t>Human health</a:t>
+            </a:r>
+            <a:endParaRPr/>
+          </a:p>
+        </p:txBody>
+      </p:sp>
+      <p:sp>
+        <p:nvSpPr>
+          <p:cNvPr id="168" name="Google Shape;168;p30"/>
+          <p:cNvSpPr/>
+          <p:nvPr/>
+        </p:nvSpPr>
+        <p:spPr>
+          <a:xfrm>
+            <a:off x="4206800" y="3185600"/>
+            <a:ext cx="1368600" cy="693600"/>
+          </a:xfrm>
+          <a:prstGeom prst="roundRect">
+            <a:avLst>
+              <a:gd fmla="val 16667" name="adj"/>
+            </a:avLst>
+          </a:prstGeom>
+          <a:solidFill>
+            <a:schemeClr val="lt2"/>
+          </a:solidFill>
+          <a:ln cap="flat" cmpd="sng" w="9525">
+            <a:solidFill>
+              <a:schemeClr val="dk2"/>
+            </a:solidFill>
+            <a:prstDash val="solid"/>
+            <a:round/>
+            <a:headEnd len="sm" w="sm" type="none"/>
+            <a:tailEnd len="sm" w="sm" type="none"/>
+          </a:ln>
+        </p:spPr>
+        <p:txBody>
+          <a:bodyPr anchorCtr="0" anchor="ctr" bIns="91425" lIns="91425" spcFirstLastPara="1" rIns="91425" wrap="square" tIns="91425">
+            <a:noAutofit/>
+          </a:bodyPr>
+          <a:lstStyle/>
+          <a:p>
+            <a:pPr indent="0" lvl="0" marL="0" rtl="0" algn="ctr">
+              <a:spcBef>
+                <a:spcPts val="0"/>
+              </a:spcBef>
+              <a:spcAft>
+                <a:spcPts val="0"/>
+              </a:spcAft>
+              <a:buNone/>
+            </a:pPr>
+            <a:r>
+              <a:rPr lang="en"/>
+              <a:t>Anthropology</a:t>
+            </a:r>
+            <a:endParaRPr/>
+          </a:p>
+        </p:txBody>
+      </p:sp>
+      <p:sp>
+        <p:nvSpPr>
+          <p:cNvPr id="169" name="Google Shape;169;p30"/>
+          <p:cNvSpPr/>
+          <p:nvPr/>
+        </p:nvSpPr>
+        <p:spPr>
+          <a:xfrm>
+            <a:off x="2301800" y="3185600"/>
+            <a:ext cx="1368600" cy="693600"/>
+          </a:xfrm>
+          <a:prstGeom prst="roundRect">
+            <a:avLst>
+              <a:gd fmla="val 16667" name="adj"/>
+            </a:avLst>
+          </a:prstGeom>
+          <a:solidFill>
+            <a:schemeClr val="lt2"/>
+          </a:solidFill>
+          <a:ln cap="flat" cmpd="sng" w="9525">
+            <a:solidFill>
+              <a:schemeClr val="dk2"/>
+            </a:solidFill>
+            <a:prstDash val="solid"/>
+            <a:round/>
+            <a:headEnd len="sm" w="sm" type="none"/>
+            <a:tailEnd len="sm" w="sm" type="none"/>
+          </a:ln>
+        </p:spPr>
+        <p:txBody>
+          <a:bodyPr anchorCtr="0" anchor="ctr" bIns="91425" lIns="91425" spcFirstLastPara="1" rIns="91425" wrap="square" tIns="91425">
+            <a:noAutofit/>
+          </a:bodyPr>
+          <a:lstStyle/>
+          <a:p>
+            <a:pPr indent="0" lvl="0" marL="0" rtl="0" algn="ctr">
+              <a:spcBef>
+                <a:spcPts val="0"/>
+              </a:spcBef>
+              <a:spcAft>
+                <a:spcPts val="0"/>
+              </a:spcAft>
+              <a:buNone/>
+            </a:pPr>
+            <a:r>
+              <a:rPr lang="en"/>
+              <a:t>Business</a:t>
+            </a:r>
+            <a:endParaRPr/>
+          </a:p>
+        </p:txBody>
+      </p:sp>
+      <p:sp>
+        <p:nvSpPr>
+          <p:cNvPr id="170" name="Google Shape;170;p30"/>
+          <p:cNvSpPr/>
+          <p:nvPr/>
+        </p:nvSpPr>
+        <p:spPr>
+          <a:xfrm>
+            <a:off x="5807000" y="1128200"/>
+            <a:ext cx="1368600" cy="693600"/>
+          </a:xfrm>
+          <a:prstGeom prst="roundRect">
+            <a:avLst>
+              <a:gd fmla="val 16667" name="adj"/>
+            </a:avLst>
+          </a:prstGeom>
+          <a:solidFill>
+            <a:schemeClr val="lt2"/>
+          </a:solidFill>
+          <a:ln cap="flat" cmpd="sng" w="9525">
+            <a:solidFill>
+              <a:schemeClr val="dk2"/>
+            </a:solidFill>
+            <a:prstDash val="solid"/>
+            <a:round/>
+            <a:headEnd len="sm" w="sm" type="none"/>
+            <a:tailEnd len="sm" w="sm" type="none"/>
+          </a:ln>
+        </p:spPr>
+        <p:txBody>
+          <a:bodyPr anchorCtr="0" anchor="ctr" bIns="91425" lIns="91425" spcFirstLastPara="1" rIns="91425" wrap="square" tIns="91425">
+            <a:noAutofit/>
+          </a:bodyPr>
+          <a:lstStyle/>
+          <a:p>
+            <a:pPr indent="0" lvl="0" marL="0" rtl="0" algn="ctr">
+              <a:spcBef>
+                <a:spcPts val="0"/>
+              </a:spcBef>
+              <a:spcAft>
+                <a:spcPts val="0"/>
+              </a:spcAft>
+              <a:buNone/>
+            </a:pPr>
+            <a:r>
+              <a:rPr lang="en"/>
+              <a:t>Agriculture</a:t>
+            </a:r>
+            <a:endParaRPr/>
+          </a:p>
+        </p:txBody>
+      </p:sp>
+      <p:sp>
+        <p:nvSpPr>
+          <p:cNvPr id="171" name="Google Shape;171;p30"/>
+          <p:cNvSpPr/>
+          <p:nvPr/>
+        </p:nvSpPr>
+        <p:spPr>
+          <a:xfrm>
+            <a:off x="6111800" y="3109400"/>
+            <a:ext cx="1368600" cy="693600"/>
+          </a:xfrm>
+          <a:prstGeom prst="roundRect">
+            <a:avLst>
+              <a:gd fmla="val 16667" name="adj"/>
+            </a:avLst>
+          </a:prstGeom>
+          <a:solidFill>
+            <a:schemeClr val="lt2"/>
+          </a:solidFill>
+          <a:ln cap="flat" cmpd="sng" w="9525">
+            <a:solidFill>
+              <a:schemeClr val="dk2"/>
+            </a:solidFill>
+            <a:prstDash val="solid"/>
+            <a:round/>
+            <a:headEnd len="sm" w="sm" type="none"/>
+            <a:tailEnd len="sm" w="sm" type="none"/>
+          </a:ln>
+        </p:spPr>
+        <p:txBody>
+          <a:bodyPr anchorCtr="0" anchor="ctr" bIns="91425" lIns="91425" spcFirstLastPara="1" rIns="91425" wrap="square" tIns="91425">
+            <a:noAutofit/>
+          </a:bodyPr>
+          <a:lstStyle/>
+          <a:p>
+            <a:pPr indent="0" lvl="0" marL="0" rtl="0" algn="ctr">
+              <a:spcBef>
+                <a:spcPts val="0"/>
+              </a:spcBef>
+              <a:spcAft>
+                <a:spcPts val="0"/>
+              </a:spcAft>
+              <a:buNone/>
+            </a:pPr>
+            <a:r>
+              <a:rPr lang="en"/>
+              <a:t>Climate Models</a:t>
+            </a:r>
+            <a:endParaRPr/>
+          </a:p>
+        </p:txBody>
+      </p:sp>
+      <p:sp>
+        <p:nvSpPr>
+          <p:cNvPr id="172" name="Google Shape;172;p30"/>
+          <p:cNvSpPr/>
+          <p:nvPr/>
+        </p:nvSpPr>
+        <p:spPr>
+          <a:xfrm>
+            <a:off x="244400" y="1128200"/>
+            <a:ext cx="1368600" cy="693600"/>
+          </a:xfrm>
+          <a:prstGeom prst="roundRect">
+            <a:avLst>
+              <a:gd fmla="val 16667" name="adj"/>
+            </a:avLst>
+          </a:prstGeom>
+          <a:solidFill>
+            <a:schemeClr val="lt2"/>
+          </a:solidFill>
+          <a:ln cap="flat" cmpd="sng" w="9525">
+            <a:solidFill>
+              <a:schemeClr val="dk2"/>
+            </a:solidFill>
+            <a:prstDash val="solid"/>
+            <a:round/>
+            <a:headEnd len="sm" w="sm" type="none"/>
+            <a:tailEnd len="sm" w="sm" type="none"/>
+          </a:ln>
+        </p:spPr>
+        <p:txBody>
+          <a:bodyPr anchorCtr="0" anchor="ctr" bIns="91425" lIns="91425" spcFirstLastPara="1" rIns="91425" wrap="square" tIns="91425">
+            <a:noAutofit/>
+          </a:bodyPr>
+          <a:lstStyle/>
+          <a:p>
+            <a:pPr indent="0" lvl="0" marL="0" rtl="0" algn="ctr">
+              <a:spcBef>
+                <a:spcPts val="0"/>
+              </a:spcBef>
+              <a:spcAft>
+                <a:spcPts val="0"/>
+              </a:spcAft>
+              <a:buNone/>
+            </a:pPr>
+            <a:r>
+              <a:rPr lang="en"/>
+              <a:t>Evolution</a:t>
+            </a:r>
+            <a:endParaRPr/>
+          </a:p>
+        </p:txBody>
+      </p:sp>
+      <p:sp>
+        <p:nvSpPr>
+          <p:cNvPr id="173" name="Google Shape;173;p30"/>
+          <p:cNvSpPr/>
+          <p:nvPr/>
+        </p:nvSpPr>
+        <p:spPr>
+          <a:xfrm>
+            <a:off x="244400" y="3185600"/>
+            <a:ext cx="1368600" cy="693600"/>
+          </a:xfrm>
+          <a:prstGeom prst="roundRect">
+            <a:avLst>
+              <a:gd fmla="val 16667" name="adj"/>
+            </a:avLst>
+          </a:prstGeom>
+          <a:solidFill>
+            <a:schemeClr val="lt2"/>
+          </a:solidFill>
+          <a:ln cap="flat" cmpd="sng" w="9525">
+            <a:solidFill>
+              <a:schemeClr val="dk2"/>
+            </a:solidFill>
+            <a:prstDash val="solid"/>
+            <a:round/>
+            <a:headEnd len="sm" w="sm" type="none"/>
+            <a:tailEnd len="sm" w="sm" type="none"/>
+          </a:ln>
+        </p:spPr>
+        <p:txBody>
+          <a:bodyPr anchorCtr="0" anchor="ctr" bIns="91425" lIns="91425" spcFirstLastPara="1" rIns="91425" wrap="square" tIns="91425">
+            <a:noAutofit/>
+          </a:bodyPr>
+          <a:lstStyle/>
+          <a:p>
+            <a:pPr indent="0" lvl="0" marL="0" rtl="0" algn="ctr">
+              <a:spcBef>
+                <a:spcPts val="0"/>
+              </a:spcBef>
+              <a:spcAft>
+                <a:spcPts val="0"/>
+              </a:spcAft>
+              <a:buNone/>
+            </a:pPr>
+            <a:r>
+              <a:rPr lang="en"/>
+              <a:t>Behavior</a:t>
             </a:r>
             <a:endParaRPr/>
           </a:p>
@@ -10746,7 +10947,7 @@
   <p:cSld>
     <p:spTree>
       <p:nvGrpSpPr>
-        <p:cNvPr id="176" name="Shape 176"/>
+        <p:cNvPr id="177" name="Shape 177"/>
         <p:cNvGrpSpPr/>
         <p:nvPr/>
       </p:nvGrpSpPr>
@@ -10760,7 +10961,7 @@
       </p:grpSpPr>
       <p:sp>
         <p:nvSpPr>
-          <p:cNvPr id="177" name="Google Shape;177;p31"/>
+          <p:cNvPr id="178" name="Google Shape;178;p31"/>
           <p:cNvSpPr txBox="1"/>
           <p:nvPr>
             <p:ph type="title"/>
@@ -10792,7 +10993,7 @@
             </a:pPr>
             <a:r>
               <a:rPr lang="en"/>
-              <a:t>The history of community ecology</a:t>
+              <a:t>Questions?</a:t>
             </a:r>
             <a:endParaRPr/>
           </a:p>
@@ -10967,7 +11168,7 @@
   <p:cSld>
     <p:spTree>
       <p:nvGrpSpPr>
-        <p:cNvPr id="181" name="Shape 181"/>
+        <p:cNvPr id="182" name="Shape 182"/>
         <p:cNvGrpSpPr/>
         <p:nvPr/>
       </p:nvGrpSpPr>
@@ -10981,7 +11182,7 @@
       </p:grpSpPr>
       <p:sp>
         <p:nvSpPr>
-          <p:cNvPr id="182" name="Google Shape;182;p32"/>
+          <p:cNvPr id="183" name="Google Shape;183;p32"/>
           <p:cNvSpPr txBox="1"/>
           <p:nvPr>
             <p:ph type="title"/>
@@ -11019,187 +11220,6 @@
           </a:p>
         </p:txBody>
       </p:sp>
-      <p:sp>
-        <p:nvSpPr>
-          <p:cNvPr id="183" name="Google Shape;183;p32"/>
-          <p:cNvSpPr txBox="1"/>
-          <p:nvPr>
-            <p:ph idx="1" type="body"/>
-          </p:nvPr>
-        </p:nvSpPr>
-        <p:spPr>
-          <a:xfrm>
-            <a:off x="311700" y="1152475"/>
-            <a:ext cx="8520600" cy="3416400"/>
-          </a:xfrm>
-          <a:prstGeom prst="rect">
-            <a:avLst/>
-          </a:prstGeom>
-        </p:spPr>
-        <p:txBody>
-          <a:bodyPr anchorCtr="0" anchor="t" bIns="91425" lIns="91425" spcFirstLastPara="1" rIns="91425" wrap="square" tIns="91425">
-            <a:normAutofit/>
-          </a:bodyPr>
-          <a:lstStyle/>
-          <a:p>
-            <a:pPr indent="-342900" lvl="0" marL="457200" rtl="0" algn="l">
-              <a:spcBef>
-                <a:spcPts val="0"/>
-              </a:spcBef>
-              <a:spcAft>
-                <a:spcPts val="0"/>
-              </a:spcAft>
-              <a:buSzPts val="1800"/>
-              <a:buChar char="●"/>
-            </a:pPr>
-            <a:r>
-              <a:rPr lang="en"/>
-              <a:t>Started with plant ecologists in the early 1900’s</a:t>
-            </a:r>
-            <a:endParaRPr/>
-          </a:p>
-          <a:p>
-            <a:pPr indent="-342900" lvl="0" marL="457200" rtl="0" algn="l">
-              <a:spcBef>
-                <a:spcPts val="0"/>
-              </a:spcBef>
-              <a:spcAft>
-                <a:spcPts val="0"/>
-              </a:spcAft>
-              <a:buSzPts val="1800"/>
-              <a:buChar char="●"/>
-            </a:pPr>
-            <a:r>
-              <a:rPr lang="en"/>
-              <a:t>Thought there were fixed types of communities</a:t>
-            </a:r>
-            <a:endParaRPr/>
-          </a:p>
-          <a:p>
-            <a:pPr indent="-342900" lvl="0" marL="457200" rtl="0" algn="l">
-              <a:spcBef>
-                <a:spcPts val="0"/>
-              </a:spcBef>
-              <a:spcAft>
-                <a:spcPts val="0"/>
-              </a:spcAft>
-              <a:buSzPts val="1800"/>
-              <a:buChar char="●"/>
-            </a:pPr>
-            <a:r>
-              <a:rPr lang="en"/>
-              <a:t>Communities progressed towards a stable “climax community”</a:t>
-            </a:r>
-            <a:endParaRPr/>
-          </a:p>
-        </p:txBody>
-      </p:sp>
-      <p:pic>
-        <p:nvPicPr>
-          <p:cNvPr id="184" name="Google Shape;184;p32"/>
-          <p:cNvPicPr preferRelativeResize="0"/>
-          <p:nvPr/>
-        </p:nvPicPr>
-        <p:blipFill>
-          <a:blip r:embed="rId3">
-            <a:alphaModFix/>
-          </a:blip>
-          <a:stretch>
-            <a:fillRect/>
-          </a:stretch>
-        </p:blipFill>
-        <p:spPr>
-          <a:xfrm>
-            <a:off x="311700" y="2265650"/>
-            <a:ext cx="5566184" cy="2303225"/>
-          </a:xfrm>
-          <a:prstGeom prst="rect">
-            <a:avLst/>
-          </a:prstGeom>
-          <a:noFill/>
-          <a:ln>
-            <a:noFill/>
-          </a:ln>
-        </p:spPr>
-      </p:pic>
-      <p:sp>
-        <p:nvSpPr>
-          <p:cNvPr id="185" name="Google Shape;185;p32"/>
-          <p:cNvSpPr txBox="1"/>
-          <p:nvPr/>
-        </p:nvSpPr>
-        <p:spPr>
-          <a:xfrm>
-            <a:off x="0" y="4881900"/>
-            <a:ext cx="6140400" cy="261600"/>
-          </a:xfrm>
-          <a:prstGeom prst="rect">
-            <a:avLst/>
-          </a:prstGeom>
-          <a:noFill/>
-          <a:ln>
-            <a:noFill/>
-          </a:ln>
-        </p:spPr>
-        <p:txBody>
-          <a:bodyPr anchorCtr="0" anchor="t" bIns="91425" lIns="91425" spcFirstLastPara="1" rIns="91425" wrap="square" tIns="91425">
-            <a:spAutoFit/>
-          </a:bodyPr>
-          <a:lstStyle/>
-          <a:p>
-            <a:pPr indent="0" lvl="0" marL="0" rtl="0" algn="l">
-              <a:spcBef>
-                <a:spcPts val="0"/>
-              </a:spcBef>
-              <a:spcAft>
-                <a:spcPts val="0"/>
-              </a:spcAft>
-              <a:buNone/>
-            </a:pPr>
-            <a:r>
-              <a:rPr lang="en" sz="500">
-                <a:solidFill>
-                  <a:schemeClr val="dk2"/>
-                </a:solidFill>
-              </a:rPr>
-              <a:t>Image: Florida Department of Environmental Protection</a:t>
-            </a:r>
-            <a:endParaRPr sz="500">
-              <a:solidFill>
-                <a:schemeClr val="dk2"/>
-              </a:solidFill>
-            </a:endParaRPr>
-          </a:p>
-        </p:txBody>
-      </p:sp>
-      <p:pic>
-        <p:nvPicPr>
-          <p:cNvPr id="186" name="Google Shape;186;p32"/>
-          <p:cNvPicPr preferRelativeResize="0"/>
-          <p:nvPr/>
-        </p:nvPicPr>
-        <p:blipFill>
-          <a:blip r:embed="rId4">
-            <a:alphaModFix/>
-          </a:blip>
-          <a:stretch>
-            <a:fillRect/>
-          </a:stretch>
-        </p:blipFill>
-        <p:spPr>
-          <a:xfrm>
-            <a:off x="5877877" y="2265650"/>
-            <a:ext cx="3080600" cy="2972900"/>
-          </a:xfrm>
-          <a:prstGeom prst="rect">
-            <a:avLst/>
-          </a:prstGeom>
-          <a:noFill/>
-          <a:ln>
-            <a:noFill/>
-          </a:ln>
-        </p:spPr>
-      </p:pic>
     </p:spTree>
   </p:cSld>
   <p:clrMapOvr>
@@ -11213,7 +11233,7 @@
   <p:cSld>
     <p:spTree>
       <p:nvGrpSpPr>
-        <p:cNvPr id="190" name="Shape 190"/>
+        <p:cNvPr id="187" name="Shape 187"/>
         <p:cNvGrpSpPr/>
         <p:nvPr/>
       </p:nvGrpSpPr>
@@ -11227,7 +11247,7 @@
       </p:grpSpPr>
       <p:sp>
         <p:nvSpPr>
-          <p:cNvPr id="191" name="Google Shape;191;p33"/>
+          <p:cNvPr id="188" name="Google Shape;188;p33"/>
           <p:cNvSpPr txBox="1"/>
           <p:nvPr>
             <p:ph type="title"/>
@@ -11267,7 +11287,7 @@
       </p:sp>
       <p:sp>
         <p:nvSpPr>
-          <p:cNvPr id="192" name="Google Shape;192;p33"/>
+          <p:cNvPr id="189" name="Google Shape;189;p33"/>
           <p:cNvSpPr txBox="1"/>
           <p:nvPr>
             <p:ph idx="1" type="body"/>
@@ -11300,7 +11320,7 @@
             </a:pPr>
             <a:r>
               <a:rPr lang="en"/>
-              <a:t>The idea of fixed types of communities has been abandoned</a:t>
+              <a:t>Started with plant ecologists in the early 1900’s</a:t>
             </a:r>
             <a:endParaRPr/>
           </a:p>
@@ -11317,7 +11337,24 @@
             </a:pPr>
             <a:r>
               <a:rPr lang="en"/>
-              <a:t>Communities as aggregations of individual species</a:t>
+              <a:t>Thought there were fixed types of communities</a:t>
+            </a:r>
+            <a:endParaRPr/>
+          </a:p>
+          <a:p>
+            <a:pPr indent="-342900" lvl="0" marL="457200" rtl="0" algn="l">
+              <a:spcBef>
+                <a:spcPts val="0"/>
+              </a:spcBef>
+              <a:spcAft>
+                <a:spcPts val="0"/>
+              </a:spcAft>
+              <a:buSzPts val="1800"/>
+              <a:buChar char="●"/>
+            </a:pPr>
+            <a:r>
+              <a:rPr lang="en"/>
+              <a:t>Communities progressed towards a stable “climax community”</a:t>
             </a:r>
             <a:endParaRPr/>
           </a:p>
@@ -11325,7 +11362,7 @@
       </p:sp>
       <p:pic>
         <p:nvPicPr>
-          <p:cNvPr id="193" name="Google Shape;193;p33"/>
+          <p:cNvPr id="190" name="Google Shape;190;p33"/>
           <p:cNvPicPr preferRelativeResize="0"/>
           <p:nvPr/>
         </p:nvPicPr>
@@ -11339,8 +11376,86 @@
         </p:blipFill>
         <p:spPr>
           <a:xfrm>
-            <a:off x="752450" y="2015775"/>
-            <a:ext cx="3035650" cy="2929525"/>
+            <a:off x="311700" y="2265650"/>
+            <a:ext cx="5566184" cy="2303225"/>
+          </a:xfrm>
+          <a:prstGeom prst="rect">
+            <a:avLst/>
+          </a:prstGeom>
+          <a:noFill/>
+          <a:ln>
+            <a:noFill/>
+          </a:ln>
+        </p:spPr>
+      </p:pic>
+      <p:sp>
+        <p:nvSpPr>
+          <p:cNvPr id="191" name="Google Shape;191;p33"/>
+          <p:cNvSpPr txBox="1"/>
+          <p:nvPr/>
+        </p:nvSpPr>
+        <p:spPr>
+          <a:xfrm>
+            <a:off x="0" y="4881900"/>
+            <a:ext cx="6140400" cy="261600"/>
+          </a:xfrm>
+          <a:prstGeom prst="rect">
+            <a:avLst/>
+          </a:prstGeom>
+          <a:noFill/>
+          <a:ln>
+            <a:noFill/>
+          </a:ln>
+        </p:spPr>
+        <p:txBody>
+          <a:bodyPr anchorCtr="0" anchor="t" bIns="91425" lIns="91425" spcFirstLastPara="1" rIns="91425" wrap="square" tIns="91425">
+            <a:spAutoFit/>
+          </a:bodyPr>
+          <a:lstStyle/>
+          <a:p>
+            <a:pPr indent="0" lvl="0" marL="0" rtl="0" algn="l">
+              <a:spcBef>
+                <a:spcPts val="0"/>
+              </a:spcBef>
+              <a:spcAft>
+                <a:spcPts val="0"/>
+              </a:spcAft>
+              <a:buNone/>
+            </a:pPr>
+            <a:r>
+              <a:rPr lang="en" sz="500">
+                <a:solidFill>
+                  <a:schemeClr val="dk2"/>
+                </a:solidFill>
+              </a:rPr>
+              <a:t>Image: Florida Department of Environmental Protection</a:t>
+            </a:r>
+            <a:endParaRPr sz="500">
+              <a:solidFill>
+                <a:schemeClr val="dk2"/>
+              </a:solidFill>
+            </a:endParaRPr>
+          </a:p>
+        </p:txBody>
+      </p:sp>
+      <p:pic>
+        <p:nvPicPr>
+          <p:cNvPr id="192" name="Google Shape;192;p33"/>
+          <p:cNvPicPr preferRelativeResize="0"/>
+          <p:nvPr/>
+        </p:nvPicPr>
+        <p:blipFill>
+          <a:blip r:embed="rId4">
+            <a:alphaModFix/>
+          </a:blip>
+          <a:stretch>
+            <a:fillRect/>
+          </a:stretch>
+        </p:blipFill>
+        <p:spPr>
+          <a:xfrm>
+            <a:off x="5877877" y="2265650"/>
+            <a:ext cx="3080600" cy="2972900"/>
           </a:xfrm>
           <a:prstGeom prst="rect">
             <a:avLst/>
@@ -11364,7 +11479,7 @@
   <p:cSld>
     <p:spTree>
       <p:nvGrpSpPr>
-        <p:cNvPr id="197" name="Shape 197"/>
+        <p:cNvPr id="196" name="Shape 196"/>
         <p:cNvGrpSpPr/>
         <p:nvPr/>
       </p:nvGrpSpPr>
@@ -11378,7 +11493,7 @@
       </p:grpSpPr>
       <p:sp>
         <p:nvSpPr>
-          <p:cNvPr id="198" name="Google Shape;198;p34"/>
+          <p:cNvPr id="197" name="Google Shape;197;p34"/>
           <p:cNvSpPr txBox="1"/>
           <p:nvPr>
             <p:ph type="title"/>
@@ -11410,7 +11525,7 @@
             </a:pPr>
             <a:r>
               <a:rPr lang="en"/>
-              <a:t>Meanwhile, in the animal world…</a:t>
+              <a:t>The history of community ecology</a:t>
             </a:r>
             <a:endParaRPr/>
           </a:p>
@@ -11418,7 +11533,7 @@
       </p:sp>
       <p:sp>
         <p:nvSpPr>
-          <p:cNvPr id="199" name="Google Shape;199;p34"/>
+          <p:cNvPr id="198" name="Google Shape;198;p34"/>
           <p:cNvSpPr txBox="1"/>
           <p:nvPr>
             <p:ph idx="1" type="body"/>
@@ -11451,7 +11566,7 @@
             </a:pPr>
             <a:r>
               <a:rPr lang="en"/>
-              <a:t>Focus on demographic processes</a:t>
+              <a:t>The idea of fixed types of communities has been abandoned</a:t>
             </a:r>
             <a:endParaRPr/>
           </a:p>
@@ -11468,12 +11583,40 @@
             </a:pPr>
             <a:r>
               <a:rPr lang="en"/>
-              <a:t>Focus on interspecific interaction (competition, predation)</a:t>
+              <a:t>Communities as aggregations of individual species</a:t>
             </a:r>
             <a:endParaRPr/>
           </a:p>
         </p:txBody>
       </p:sp>
+      <p:pic>
+        <p:nvPicPr>
+          <p:cNvPr id="199" name="Google Shape;199;p34"/>
+          <p:cNvPicPr preferRelativeResize="0"/>
+          <p:nvPr/>
+        </p:nvPicPr>
+        <p:blipFill>
+          <a:blip r:embed="rId3">
+            <a:alphaModFix/>
+          </a:blip>
+          <a:stretch>
+            <a:fillRect/>
+          </a:stretch>
+        </p:blipFill>
+        <p:spPr>
+          <a:xfrm>
+            <a:off x="752450" y="2015775"/>
+            <a:ext cx="3035650" cy="2929525"/>
+          </a:xfrm>
+          <a:prstGeom prst="rect">
+            <a:avLst/>
+          </a:prstGeom>
+          <a:noFill/>
+          <a:ln>
+            <a:noFill/>
+          </a:ln>
+        </p:spPr>
+      </p:pic>
     </p:spTree>
   </p:cSld>
   <p:clrMapOvr>
@@ -11597,154 +11740,6 @@
           </a:p>
         </p:txBody>
       </p:sp>
-      <p:pic>
-        <p:nvPicPr>
-          <p:cNvPr id="206" name="Google Shape;206;p35"/>
-          <p:cNvPicPr preferRelativeResize="0"/>
-          <p:nvPr/>
-        </p:nvPicPr>
-        <p:blipFill>
-          <a:blip r:embed="rId3">
-            <a:alphaModFix/>
-          </a:blip>
-          <a:stretch>
-            <a:fillRect/>
-          </a:stretch>
-        </p:blipFill>
-        <p:spPr>
-          <a:xfrm>
-            <a:off x="385525" y="2071825"/>
-            <a:ext cx="1967875" cy="1192650"/>
-          </a:xfrm>
-          <a:prstGeom prst="rect">
-            <a:avLst/>
-          </a:prstGeom>
-          <a:noFill/>
-          <a:ln>
-            <a:noFill/>
-          </a:ln>
-        </p:spPr>
-      </p:pic>
-      <p:sp>
-        <p:nvSpPr>
-          <p:cNvPr id="207" name="Google Shape;207;p35"/>
-          <p:cNvSpPr txBox="1"/>
-          <p:nvPr/>
-        </p:nvSpPr>
-        <p:spPr>
-          <a:xfrm>
-            <a:off x="385525" y="3504475"/>
-            <a:ext cx="2094000" cy="738900"/>
-          </a:xfrm>
-          <a:prstGeom prst="rect">
-            <a:avLst/>
-          </a:prstGeom>
-          <a:noFill/>
-          <a:ln>
-            <a:noFill/>
-          </a:ln>
-        </p:spPr>
-        <p:txBody>
-          <a:bodyPr anchorCtr="0" anchor="t" bIns="91425" lIns="91425" spcFirstLastPara="1" rIns="91425" wrap="square" tIns="91425">
-            <a:spAutoFit/>
-          </a:bodyPr>
-          <a:lstStyle/>
-          <a:p>
-            <a:pPr indent="0" lvl="0" marL="0" rtl="0" algn="l">
-              <a:spcBef>
-                <a:spcPts val="0"/>
-              </a:spcBef>
-              <a:spcAft>
-                <a:spcPts val="0"/>
-              </a:spcAft>
-              <a:buNone/>
-            </a:pPr>
-            <a:r>
-              <a:rPr lang="en" sz="1800">
-                <a:solidFill>
-                  <a:schemeClr val="dk2"/>
-                </a:solidFill>
-              </a:rPr>
-              <a:t>Lotka-Volterra Model</a:t>
-            </a:r>
-            <a:endParaRPr sz="1800">
-              <a:solidFill>
-                <a:schemeClr val="dk2"/>
-              </a:solidFill>
-            </a:endParaRPr>
-          </a:p>
-        </p:txBody>
-      </p:sp>
-      <p:pic>
-        <p:nvPicPr>
-          <p:cNvPr id="208" name="Google Shape;208;p35"/>
-          <p:cNvPicPr preferRelativeResize="0"/>
-          <p:nvPr/>
-        </p:nvPicPr>
-        <p:blipFill>
-          <a:blip r:embed="rId4">
-            <a:alphaModFix/>
-          </a:blip>
-          <a:stretch>
-            <a:fillRect/>
-          </a:stretch>
-        </p:blipFill>
-        <p:spPr>
-          <a:xfrm>
-            <a:off x="3961125" y="2113700"/>
-            <a:ext cx="4008825" cy="2455175"/>
-          </a:xfrm>
-          <a:prstGeom prst="rect">
-            <a:avLst/>
-          </a:prstGeom>
-          <a:noFill/>
-          <a:ln>
-            <a:noFill/>
-          </a:ln>
-        </p:spPr>
-      </p:pic>
-      <p:sp>
-        <p:nvSpPr>
-          <p:cNvPr id="209" name="Google Shape;209;p35"/>
-          <p:cNvSpPr txBox="1"/>
-          <p:nvPr/>
-        </p:nvSpPr>
-        <p:spPr>
-          <a:xfrm>
-            <a:off x="3076800" y="4851000"/>
-            <a:ext cx="6067200" cy="292500"/>
-          </a:xfrm>
-          <a:prstGeom prst="rect">
-            <a:avLst/>
-          </a:prstGeom>
-          <a:noFill/>
-          <a:ln>
-            <a:noFill/>
-          </a:ln>
-        </p:spPr>
-        <p:txBody>
-          <a:bodyPr anchorCtr="0" anchor="t" bIns="91425" lIns="91425" spcFirstLastPara="1" rIns="91425" wrap="square" tIns="91425">
-            <a:spAutoFit/>
-          </a:bodyPr>
-          <a:lstStyle/>
-          <a:p>
-            <a:pPr indent="0" lvl="0" marL="0" rtl="0" algn="l">
-              <a:spcBef>
-                <a:spcPts val="0"/>
-              </a:spcBef>
-              <a:spcAft>
-                <a:spcPts val="0"/>
-              </a:spcAft>
-              <a:buNone/>
-            </a:pPr>
-            <a:r>
-              <a:rPr lang="en" sz="700"/>
-              <a:t>By Lamiot - Own work based on Pilovsky et al. 2001 (p. 16, figure 1.13), CC BY-SA 4.0, https://commons.wikimedia.org/w/index.php?curid=45036611</a:t>
-            </a:r>
-            <a:endParaRPr sz="700"/>
-          </a:p>
-        </p:txBody>
-      </p:sp>
     </p:spTree>
   </p:cSld>
   <p:clrMapOvr>
@@ -11758,7 +11753,7 @@
   <p:cSld>
     <p:spTree>
       <p:nvGrpSpPr>
-        <p:cNvPr id="213" name="Shape 213"/>
+        <p:cNvPr id="209" name="Shape 209"/>
         <p:cNvGrpSpPr/>
         <p:nvPr/>
       </p:nvGrpSpPr>
@@ -11772,7 +11767,7 @@
       </p:grpSpPr>
       <p:sp>
         <p:nvSpPr>
-          <p:cNvPr id="214" name="Google Shape;214;p36"/>
+          <p:cNvPr id="210" name="Google Shape;210;p36"/>
           <p:cNvSpPr txBox="1"/>
           <p:nvPr>
             <p:ph type="title"/>
@@ -11800,11 +11795,6 @@
               <a:spcAft>
                 <a:spcPts val="0"/>
               </a:spcAft>
-              <a:buClr>
-                <a:schemeClr val="dk1"/>
-              </a:buClr>
-              <a:buSzPct val="39285"/>
-              <a:buFont typeface="Arial"/>
               <a:buNone/>
             </a:pPr>
             <a:r>
@@ -11817,7 +11807,7 @@
       </p:sp>
       <p:sp>
         <p:nvSpPr>
-          <p:cNvPr id="215" name="Google Shape;215;p36"/>
+          <p:cNvPr id="211" name="Google Shape;211;p36"/>
           <p:cNvSpPr txBox="1"/>
           <p:nvPr>
             <p:ph idx="1" type="body"/>
@@ -11850,19 +11840,7 @@
             </a:pPr>
             <a:r>
               <a:rPr lang="en"/>
-              <a:t>Mathematical </a:t>
-            </a:r>
-            <a:r>
-              <a:rPr lang="en"/>
-              <a:t>equations</a:t>
-            </a:r>
-            <a:r>
-              <a:rPr lang="en"/>
-              <a:t> </a:t>
-            </a:r>
-            <a:r>
-              <a:rPr lang="en"/>
-              <a:t>let to predictions about coexistence</a:t>
+              <a:t>Focus on demographic processes</a:t>
             </a:r>
             <a:endParaRPr/>
           </a:p>
@@ -11879,24 +11857,7 @@
             </a:pPr>
             <a:r>
               <a:rPr lang="en"/>
-              <a:t>Tested in experimental systems</a:t>
-            </a:r>
-            <a:endParaRPr/>
-          </a:p>
-          <a:p>
-            <a:pPr indent="-342900" lvl="0" marL="457200" rtl="0" algn="l">
-              <a:spcBef>
-                <a:spcPts val="0"/>
-              </a:spcBef>
-              <a:spcAft>
-                <a:spcPts val="0"/>
-              </a:spcAft>
-              <a:buSzPts val="1800"/>
-              <a:buChar char="●"/>
-            </a:pPr>
-            <a:r>
-              <a:rPr lang="en"/>
-              <a:t>Competitive Exclusion Principle</a:t>
+              <a:t>Focus on interspecific interaction (competition, predation)</a:t>
             </a:r>
             <a:endParaRPr/>
           </a:p>
@@ -11904,7 +11865,7 @@
       </p:sp>
       <p:pic>
         <p:nvPicPr>
-          <p:cNvPr id="216" name="Google Shape;216;p36"/>
+          <p:cNvPr id="212" name="Google Shape;212;p36"/>
           <p:cNvPicPr preferRelativeResize="0"/>
           <p:nvPr/>
         </p:nvPicPr>
@@ -11918,8 +11879,8 @@
         </p:blipFill>
         <p:spPr>
           <a:xfrm>
-            <a:off x="4393650" y="1609450"/>
-            <a:ext cx="4554226" cy="3296200"/>
+            <a:off x="385525" y="2071825"/>
+            <a:ext cx="1967875" cy="1192650"/>
           </a:xfrm>
           <a:prstGeom prst="rect">
             <a:avLst/>
@@ -11932,14 +11893,14 @@
       </p:pic>
       <p:sp>
         <p:nvSpPr>
-          <p:cNvPr id="217" name="Google Shape;217;p36"/>
+          <p:cNvPr id="213" name="Google Shape;213;p36"/>
           <p:cNvSpPr txBox="1"/>
           <p:nvPr/>
         </p:nvSpPr>
         <p:spPr>
           <a:xfrm>
-            <a:off x="3435600" y="4905650"/>
-            <a:ext cx="5708400" cy="222600"/>
+            <a:off x="385525" y="3504475"/>
+            <a:ext cx="2094000" cy="738900"/>
           </a:xfrm>
           <a:prstGeom prst="rect">
             <a:avLst/>
@@ -11950,33 +11911,103 @@
           </a:ln>
         </p:spPr>
         <p:txBody>
-          <a:bodyPr anchorCtr="0" anchor="b" bIns="91425" lIns="91425" spcFirstLastPara="1" rIns="91425" wrap="square" tIns="91425">
-            <a:noAutofit/>
+          <a:bodyPr anchorCtr="0" anchor="t" bIns="91425" lIns="91425" spcFirstLastPara="1" rIns="91425" wrap="square" tIns="91425">
+            <a:spAutoFit/>
           </a:bodyPr>
           <a:lstStyle/>
           <a:p>
-            <a:pPr indent="0" lvl="0" marL="0" rtl="0" algn="r">
-              <a:spcBef>
-                <a:spcPts val="0"/>
-              </a:spcBef>
-              <a:spcAft>
-                <a:spcPts val="0"/>
-              </a:spcAft>
-              <a:buNone/>
-            </a:pPr>
-            <a:r>
-              <a:rPr lang="en" sz="700">
+            <a:pPr indent="0" lvl="0" marL="0" rtl="0" algn="l">
+              <a:spcBef>
+                <a:spcPts val="0"/>
+              </a:spcBef>
+              <a:spcAft>
+                <a:spcPts val="0"/>
+              </a:spcAft>
+              <a:buNone/>
+            </a:pPr>
+            <a:r>
+              <a:rPr lang="en" sz="1800">
                 <a:solidFill>
                   <a:schemeClr val="dk2"/>
                 </a:solidFill>
               </a:rPr>
-              <a:t>CNX OpenStax - http://cnx.org/contents/GFy_h8cu@10.53:rZudN6XP@2/Introduction</a:t>
-            </a:r>
-            <a:endParaRPr sz="700">
+              <a:t>Lotka-Volterra Model</a:t>
+            </a:r>
+            <a:endParaRPr sz="1800">
               <a:solidFill>
                 <a:schemeClr val="dk2"/>
               </a:solidFill>
             </a:endParaRPr>
+          </a:p>
+        </p:txBody>
+      </p:sp>
+      <p:pic>
+        <p:nvPicPr>
+          <p:cNvPr id="214" name="Google Shape;214;p36"/>
+          <p:cNvPicPr preferRelativeResize="0"/>
+          <p:nvPr/>
+        </p:nvPicPr>
+        <p:blipFill>
+          <a:blip r:embed="rId4">
+            <a:alphaModFix/>
+          </a:blip>
+          <a:stretch>
+            <a:fillRect/>
+          </a:stretch>
+        </p:blipFill>
+        <p:spPr>
+          <a:xfrm>
+            <a:off x="3961125" y="2113700"/>
+            <a:ext cx="4008825" cy="2455175"/>
+          </a:xfrm>
+          <a:prstGeom prst="rect">
+            <a:avLst/>
+          </a:prstGeom>
+          <a:noFill/>
+          <a:ln>
+            <a:noFill/>
+          </a:ln>
+        </p:spPr>
+      </p:pic>
+      <p:sp>
+        <p:nvSpPr>
+          <p:cNvPr id="215" name="Google Shape;215;p36"/>
+          <p:cNvSpPr txBox="1"/>
+          <p:nvPr/>
+        </p:nvSpPr>
+        <p:spPr>
+          <a:xfrm>
+            <a:off x="3076800" y="4851000"/>
+            <a:ext cx="6067200" cy="292500"/>
+          </a:xfrm>
+          <a:prstGeom prst="rect">
+            <a:avLst/>
+          </a:prstGeom>
+          <a:noFill/>
+          <a:ln>
+            <a:noFill/>
+          </a:ln>
+        </p:spPr>
+        <p:txBody>
+          <a:bodyPr anchorCtr="0" anchor="t" bIns="91425" lIns="91425" spcFirstLastPara="1" rIns="91425" wrap="square" tIns="91425">
+            <a:spAutoFit/>
+          </a:bodyPr>
+          <a:lstStyle/>
+          <a:p>
+            <a:pPr indent="0" lvl="0" marL="0" rtl="0" algn="l">
+              <a:spcBef>
+                <a:spcPts val="0"/>
+              </a:spcBef>
+              <a:spcAft>
+                <a:spcPts val="0"/>
+              </a:spcAft>
+              <a:buNone/>
+            </a:pPr>
+            <a:r>
+              <a:rPr lang="en" sz="700"/>
+              <a:t>By Lamiot - Own work based on Pilovsky et al. 2001 (p. 16, figure 1.13), CC BY-SA 4.0, https://commons.wikimedia.org/w/index.php?curid=45036611</a:t>
+            </a:r>
+            <a:endParaRPr sz="700"/>
           </a:p>
         </p:txBody>
       </p:sp>
@@ -11993,7 +12024,7 @@
   <p:cSld>
     <p:spTree>
       <p:nvGrpSpPr>
-        <p:cNvPr id="221" name="Shape 221"/>
+        <p:cNvPr id="219" name="Shape 219"/>
         <p:cNvGrpSpPr/>
         <p:nvPr/>
       </p:nvGrpSpPr>
@@ -12007,7 +12038,7 @@
       </p:grpSpPr>
       <p:sp>
         <p:nvSpPr>
-          <p:cNvPr id="222" name="Google Shape;222;p37"/>
+          <p:cNvPr id="220" name="Google Shape;220;p37"/>
           <p:cNvSpPr txBox="1"/>
           <p:nvPr>
             <p:ph type="title"/>
@@ -12035,11 +12066,16 @@
               <a:spcAft>
                 <a:spcPts val="0"/>
               </a:spcAft>
+              <a:buClr>
+                <a:schemeClr val="dk1"/>
+              </a:buClr>
+              <a:buSzPct val="39285"/>
+              <a:buFont typeface="Arial"/>
               <a:buNone/>
             </a:pPr>
             <a:r>
               <a:rPr lang="en"/>
-              <a:t>Plants vs Animals</a:t>
+              <a:t>Meanwhile, in the animal world…</a:t>
             </a:r>
             <a:endParaRPr/>
           </a:p>
@@ -12047,7 +12083,7 @@
       </p:sp>
       <p:sp>
         <p:nvSpPr>
-          <p:cNvPr id="223" name="Google Shape;223;p37"/>
+          <p:cNvPr id="221" name="Google Shape;221;p37"/>
           <p:cNvSpPr txBox="1"/>
           <p:nvPr>
             <p:ph idx="1" type="body"/>
@@ -12068,84 +12104,145 @@
           </a:bodyPr>
           <a:lstStyle/>
           <a:p>
-            <a:pPr indent="0" lvl="0" marL="0" rtl="0" algn="l">
-              <a:spcBef>
-                <a:spcPts val="0"/>
-              </a:spcBef>
-              <a:spcAft>
-                <a:spcPts val="0"/>
-              </a:spcAft>
-              <a:buNone/>
+            <a:pPr indent="-342900" lvl="0" marL="457200" rtl="0" algn="l">
+              <a:spcBef>
+                <a:spcPts val="0"/>
+              </a:spcBef>
+              <a:spcAft>
+                <a:spcPts val="0"/>
+              </a:spcAft>
+              <a:buSzPts val="1800"/>
+              <a:buChar char="●"/>
             </a:pPr>
             <a:r>
               <a:rPr lang="en"/>
-              <a:t>Plants - Focus on what lives where</a:t>
-            </a:r>
-            <a:endParaRPr/>
-          </a:p>
-          <a:p>
-            <a:pPr indent="0" lvl="0" marL="0" rtl="0" algn="l">
-              <a:spcBef>
-                <a:spcPts val="1200"/>
-              </a:spcBef>
-              <a:spcAft>
-                <a:spcPts val="0"/>
-              </a:spcAft>
-              <a:buNone/>
-            </a:pPr>
+              <a:t>Mathematical </a:t>
+            </a:r>
             <a:r>
               <a:rPr lang="en"/>
-              <a:t>Animals - Focus on interactions</a:t>
-            </a:r>
-            <a:endParaRPr/>
-          </a:p>
-          <a:p>
-            <a:pPr indent="0" lvl="0" marL="0" rtl="0" algn="l">
-              <a:spcBef>
-                <a:spcPts val="1200"/>
-              </a:spcBef>
-              <a:spcAft>
-                <a:spcPts val="0"/>
-              </a:spcAft>
-              <a:buNone/>
-            </a:pPr>
-            <a:r>
-              <a:t/>
-            </a:r>
-            <a:endParaRPr/>
-          </a:p>
-          <a:p>
-            <a:pPr indent="0" lvl="0" marL="0" rtl="0" algn="l">
-              <a:spcBef>
-                <a:spcPts val="1200"/>
-              </a:spcBef>
-              <a:spcAft>
-                <a:spcPts val="0"/>
-              </a:spcAft>
-              <a:buNone/>
-            </a:pPr>
+              <a:t>equations</a:t>
+            </a:r>
             <a:r>
               <a:rPr lang="en"/>
-              <a:t>These different focuses make sense!</a:t>
+              <a:t> </a:t>
+            </a:r>
+            <a:r>
+              <a:rPr lang="en"/>
+              <a:t>let to predictions about coexistence</a:t>
             </a:r>
             <a:endParaRPr/>
           </a:p>
           <a:p>
             <a:pPr indent="-342900" lvl="0" marL="457200" rtl="0" algn="l">
               <a:spcBef>
-                <a:spcPts val="1200"/>
+                <a:spcPts val="0"/>
               </a:spcBef>
               <a:spcAft>
                 <a:spcPts val="0"/>
               </a:spcAft>
               <a:buSzPts val="1800"/>
-              <a:buChar char="-"/>
+              <a:buChar char="●"/>
             </a:pPr>
             <a:r>
               <a:rPr lang="en"/>
-              <a:t>Differences in generation times, predation vs herbivory</a:t>
-            </a:r>
-            <a:endParaRPr/>
+              <a:t>Tested in experimental systems</a:t>
+            </a:r>
+            <a:endParaRPr/>
+          </a:p>
+          <a:p>
+            <a:pPr indent="-342900" lvl="0" marL="457200" rtl="0" algn="l">
+              <a:spcBef>
+                <a:spcPts val="0"/>
+              </a:spcBef>
+              <a:spcAft>
+                <a:spcPts val="0"/>
+              </a:spcAft>
+              <a:buSzPts val="1800"/>
+              <a:buChar char="●"/>
+            </a:pPr>
+            <a:r>
+              <a:rPr lang="en"/>
+              <a:t>Competitive Exclusion Principle</a:t>
+            </a:r>
+            <a:endParaRPr/>
+          </a:p>
+        </p:txBody>
+      </p:sp>
+      <p:pic>
+        <p:nvPicPr>
+          <p:cNvPr id="222" name="Google Shape;222;p37"/>
+          <p:cNvPicPr preferRelativeResize="0"/>
+          <p:nvPr/>
+        </p:nvPicPr>
+        <p:blipFill>
+          <a:blip r:embed="rId3">
+            <a:alphaModFix/>
+          </a:blip>
+          <a:stretch>
+            <a:fillRect/>
+          </a:stretch>
+        </p:blipFill>
+        <p:spPr>
+          <a:xfrm>
+            <a:off x="4393650" y="1609450"/>
+            <a:ext cx="4554226" cy="3296200"/>
+          </a:xfrm>
+          <a:prstGeom prst="rect">
+            <a:avLst/>
+          </a:prstGeom>
+          <a:noFill/>
+          <a:ln>
+            <a:noFill/>
+          </a:ln>
+        </p:spPr>
+      </p:pic>
+      <p:sp>
+        <p:nvSpPr>
+          <p:cNvPr id="223" name="Google Shape;223;p37"/>
+          <p:cNvSpPr txBox="1"/>
+          <p:nvPr/>
+        </p:nvSpPr>
+        <p:spPr>
+          <a:xfrm>
+            <a:off x="3435600" y="4905650"/>
+            <a:ext cx="5708400" cy="222600"/>
+          </a:xfrm>
+          <a:prstGeom prst="rect">
+            <a:avLst/>
+          </a:prstGeom>
+          <a:noFill/>
+          <a:ln>
+            <a:noFill/>
+          </a:ln>
+        </p:spPr>
+        <p:txBody>
+          <a:bodyPr anchorCtr="0" anchor="b" bIns="91425" lIns="91425" spcFirstLastPara="1" rIns="91425" wrap="square" tIns="91425">
+            <a:noAutofit/>
+          </a:bodyPr>
+          <a:lstStyle/>
+          <a:p>
+            <a:pPr indent="0" lvl="0" marL="0" rtl="0" algn="r">
+              <a:spcBef>
+                <a:spcPts val="0"/>
+              </a:spcBef>
+              <a:spcAft>
+                <a:spcPts val="0"/>
+              </a:spcAft>
+              <a:buNone/>
+            </a:pPr>
+            <a:r>
+              <a:rPr lang="en" sz="700">
+                <a:solidFill>
+                  <a:schemeClr val="dk2"/>
+                </a:solidFill>
+              </a:rPr>
+              <a:t>CNX OpenStax - http://cnx.org/contents/GFy_h8cu@10.53:rZudN6XP@2/Introduction</a:t>
+            </a:r>
+            <a:endParaRPr sz="700">
+              <a:solidFill>
+                <a:schemeClr val="dk2"/>
+              </a:solidFill>
+            </a:endParaRPr>
           </a:p>
         </p:txBody>
       </p:sp>
@@ -12208,7 +12305,7 @@
             </a:pPr>
             <a:r>
               <a:rPr lang="en"/>
-              <a:t>Niche Concept</a:t>
+              <a:t>Plants vs Animals</a:t>
             </a:r>
             <a:endParaRPr/>
           </a:p>
@@ -12248,7 +12345,7 @@
             </a:pPr>
             <a:r>
               <a:rPr lang="en"/>
-              <a:t>Grinnellian (Abiotic) Niche: Environmental requirements</a:t>
+              <a:t>Plants - Focus on what lives where</a:t>
             </a:r>
             <a:endParaRPr/>
           </a:p>
@@ -12258,7 +12355,23 @@
                 <a:spcPts val="1200"/>
               </a:spcBef>
               <a:spcAft>
+                <a:spcPts val="0"/>
+              </a:spcAft>
+              <a:buNone/>
+            </a:pPr>
+            <a:r>
+              <a:rPr lang="en"/>
+              <a:t>Animals - Focus on interactions</a:t>
+            </a:r>
+            <a:endParaRPr/>
+          </a:p>
+          <a:p>
+            <a:pPr indent="0" lvl="0" marL="0" rtl="0" algn="l">
+              <a:spcBef>
                 <a:spcPts val="1200"/>
+              </a:spcBef>
+              <a:spcAft>
+                <a:spcPts val="0"/>
               </a:spcAft>
               <a:buNone/>
             </a:pPr>
@@ -12267,36 +12380,41 @@
             </a:r>
             <a:endParaRPr/>
           </a:p>
+          <a:p>
+            <a:pPr indent="0" lvl="0" marL="0" rtl="0" algn="l">
+              <a:spcBef>
+                <a:spcPts val="1200"/>
+              </a:spcBef>
+              <a:spcAft>
+                <a:spcPts val="0"/>
+              </a:spcAft>
+              <a:buNone/>
+            </a:pPr>
+            <a:r>
+              <a:rPr lang="en"/>
+              <a:t>These different focuses make sense!</a:t>
+            </a:r>
+            <a:endParaRPr/>
+          </a:p>
+          <a:p>
+            <a:pPr indent="-342900" lvl="0" marL="457200" rtl="0" algn="l">
+              <a:spcBef>
+                <a:spcPts val="1200"/>
+              </a:spcBef>
+              <a:spcAft>
+                <a:spcPts val="0"/>
+              </a:spcAft>
+              <a:buSzPts val="1800"/>
+              <a:buChar char="-"/>
+            </a:pPr>
+            <a:r>
+              <a:rPr lang="en"/>
+              <a:t>Differences in generation times, predation vs herbivory</a:t>
+            </a:r>
+            <a:endParaRPr/>
+          </a:p>
         </p:txBody>
       </p:sp>
-      <p:pic>
-        <p:nvPicPr>
-          <p:cNvPr id="230" name="Google Shape;230;p38"/>
-          <p:cNvPicPr preferRelativeResize="0"/>
-          <p:nvPr/>
-        </p:nvPicPr>
-        <p:blipFill>
-          <a:blip r:embed="rId3">
-            <a:alphaModFix/>
-          </a:blip>
-          <a:stretch>
-            <a:fillRect/>
-          </a:stretch>
-        </p:blipFill>
-        <p:spPr>
-          <a:xfrm>
-            <a:off x="407550" y="2666800"/>
-            <a:ext cx="2434225" cy="2349131"/>
-          </a:xfrm>
-          <a:prstGeom prst="rect">
-            <a:avLst/>
-          </a:prstGeom>
-          <a:noFill/>
-          <a:ln>
-            <a:noFill/>
-          </a:ln>
-        </p:spPr>
-      </p:pic>
     </p:spTree>
   </p:cSld>
   <p:clrMapOvr>
@@ -12310,7 +12428,7 @@
   <p:cSld>
     <p:spTree>
       <p:nvGrpSpPr>
-        <p:cNvPr id="234" name="Shape 234"/>
+        <p:cNvPr id="233" name="Shape 233"/>
         <p:cNvGrpSpPr/>
         <p:nvPr/>
       </p:nvGrpSpPr>
@@ -12324,7 +12442,7 @@
       </p:grpSpPr>
       <p:sp>
         <p:nvSpPr>
-          <p:cNvPr id="235" name="Google Shape;235;p39"/>
+          <p:cNvPr id="234" name="Google Shape;234;p39"/>
           <p:cNvSpPr txBox="1"/>
           <p:nvPr>
             <p:ph type="title"/>
@@ -12364,7 +12482,7 @@
       </p:sp>
       <p:sp>
         <p:nvSpPr>
-          <p:cNvPr id="236" name="Google Shape;236;p39"/>
+          <p:cNvPr id="235" name="Google Shape;235;p39"/>
           <p:cNvSpPr txBox="1"/>
           <p:nvPr>
             <p:ph idx="1" type="body"/>
@@ -12406,22 +12524,6 @@
                 <a:spcPts val="1200"/>
               </a:spcBef>
               <a:spcAft>
-                <a:spcPts val="0"/>
-              </a:spcAft>
-              <a:buNone/>
-            </a:pPr>
-            <a:r>
-              <a:rPr lang="en"/>
-              <a:t>Eltonian (Biotic) Niche: Species’ interactions in a community</a:t>
-            </a:r>
-            <a:endParaRPr/>
-          </a:p>
-          <a:p>
-            <a:pPr indent="0" lvl="0" marL="0" rtl="0" algn="l">
-              <a:spcBef>
-                <a:spcPts val="1200"/>
-              </a:spcBef>
-              <a:spcAft>
                 <a:spcPts val="1200"/>
               </a:spcAft>
               <a:buNone/>
@@ -12435,7 +12537,7 @@
       </p:sp>
       <p:pic>
         <p:nvPicPr>
-          <p:cNvPr id="237" name="Google Shape;237;p39"/>
+          <p:cNvPr id="236" name="Google Shape;236;p39"/>
           <p:cNvPicPr preferRelativeResize="0"/>
           <p:nvPr/>
         </p:nvPicPr>
@@ -12451,34 +12553,6 @@
           <a:xfrm>
             <a:off x="407550" y="2666800"/>
             <a:ext cx="2434225" cy="2349131"/>
-          </a:xfrm>
-          <a:prstGeom prst="rect">
-            <a:avLst/>
-          </a:prstGeom>
-          <a:noFill/>
-          <a:ln>
-            <a:noFill/>
-          </a:ln>
-        </p:spPr>
-      </p:pic>
-      <p:pic>
-        <p:nvPicPr>
-          <p:cNvPr id="238" name="Google Shape;238;p39"/>
-          <p:cNvPicPr preferRelativeResize="0"/>
-          <p:nvPr/>
-        </p:nvPicPr>
-        <p:blipFill>
-          <a:blip r:embed="rId4">
-            <a:alphaModFix/>
-          </a:blip>
-          <a:stretch>
-            <a:fillRect/>
-          </a:stretch>
-        </p:blipFill>
-        <p:spPr>
-          <a:xfrm>
-            <a:off x="3259074" y="2666800"/>
-            <a:ext cx="2434225" cy="2349124"/>
           </a:xfrm>
           <a:prstGeom prst="rect">
             <a:avLst/>
@@ -12502,7 +12576,7 @@
   <p:cSld>
     <p:spTree>
       <p:nvGrpSpPr>
-        <p:cNvPr id="242" name="Shape 242"/>
+        <p:cNvPr id="240" name="Shape 240"/>
         <p:cNvGrpSpPr/>
         <p:nvPr/>
       </p:nvGrpSpPr>
@@ -12516,7 +12590,7 @@
       </p:grpSpPr>
       <p:sp>
         <p:nvSpPr>
-          <p:cNvPr id="243" name="Google Shape;243;p40"/>
+          <p:cNvPr id="241" name="Google Shape;241;p40"/>
           <p:cNvSpPr txBox="1"/>
           <p:nvPr>
             <p:ph type="title"/>
@@ -12556,7 +12630,7 @@
       </p:sp>
       <p:sp>
         <p:nvSpPr>
-          <p:cNvPr id="244" name="Google Shape;244;p40"/>
+          <p:cNvPr id="242" name="Google Shape;242;p40"/>
           <p:cNvSpPr txBox="1"/>
           <p:nvPr>
             <p:ph idx="1" type="body"/>
@@ -12619,8 +12693,7 @@
               <a:buNone/>
             </a:pPr>
             <a:r>
-              <a:rPr lang="en"/>
-              <a:t>Hutchinsonian (n-dimensional) Niche: Environment + Interactions</a:t>
+              <a:t/>
             </a:r>
             <a:endParaRPr/>
           </a:p>
@@ -12628,7 +12701,7 @@
       </p:sp>
       <p:pic>
         <p:nvPicPr>
-          <p:cNvPr id="245" name="Google Shape;245;p40"/>
+          <p:cNvPr id="243" name="Google Shape;243;p40"/>
           <p:cNvPicPr preferRelativeResize="0"/>
           <p:nvPr/>
         </p:nvPicPr>
@@ -12656,7 +12729,7 @@
       </p:pic>
       <p:pic>
         <p:nvPicPr>
-          <p:cNvPr id="246" name="Google Shape;246;p40"/>
+          <p:cNvPr id="244" name="Google Shape;244;p40"/>
           <p:cNvPicPr preferRelativeResize="0"/>
           <p:nvPr/>
         </p:nvPicPr>
@@ -12672,33 +12745,6 @@
           <a:xfrm>
             <a:off x="3259074" y="2666800"/>
             <a:ext cx="2434225" cy="2349124"/>
-          </a:xfrm>
-          <a:prstGeom prst="rect">
-            <a:avLst/>
-          </a:prstGeom>
-          <a:noFill/>
-          <a:ln>
-            <a:noFill/>
-          </a:ln>
-        </p:spPr>
-      </p:pic>
-      <p:pic>
-        <p:nvPicPr>
-          <p:cNvPr id="247" name="Google Shape;247;p40"/>
-          <p:cNvPicPr preferRelativeResize="0"/>
-          <p:nvPr/>
-        </p:nvPicPr>
-        <p:blipFill rotWithShape="1">
-          <a:blip r:embed="rId5">
-            <a:alphaModFix/>
-          </a:blip>
-          <a:srcRect b="31824" l="7466" r="59305" t="16370"/>
-          <a:stretch/>
-        </p:blipFill>
-        <p:spPr>
-          <a:xfrm>
-            <a:off x="5966025" y="2622800"/>
-            <a:ext cx="2678626" cy="2349124"/>
           </a:xfrm>
           <a:prstGeom prst="rect">
             <a:avLst/>
@@ -12722,7 +12768,7 @@
   <p:cSld>
     <p:spTree>
       <p:nvGrpSpPr>
-        <p:cNvPr id="251" name="Shape 251"/>
+        <p:cNvPr id="248" name="Shape 248"/>
         <p:cNvGrpSpPr/>
         <p:nvPr/>
       </p:nvGrpSpPr>
@@ -12736,7 +12782,7 @@
       </p:grpSpPr>
       <p:sp>
         <p:nvSpPr>
-          <p:cNvPr id="252" name="Google Shape;252;p41"/>
+          <p:cNvPr id="249" name="Google Shape;249;p41"/>
           <p:cNvSpPr txBox="1"/>
           <p:nvPr>
             <p:ph type="title"/>
@@ -12768,7 +12814,7 @@
             </a:pPr>
             <a:r>
               <a:rPr lang="en"/>
-              <a:t>Linking Niches to Competition</a:t>
+              <a:t>Niche Concept</a:t>
             </a:r>
             <a:endParaRPr/>
           </a:p>
@@ -12776,7 +12822,7 @@
       </p:sp>
       <p:sp>
         <p:nvSpPr>
-          <p:cNvPr id="253" name="Google Shape;253;p41"/>
+          <p:cNvPr id="250" name="Google Shape;250;p41"/>
           <p:cNvSpPr txBox="1"/>
           <p:nvPr>
             <p:ph idx="1" type="body"/>
@@ -12797,36 +12843,34 @@
           </a:bodyPr>
           <a:lstStyle/>
           <a:p>
-            <a:pPr indent="-342900" lvl="0" marL="457200" rtl="0" algn="l">
-              <a:spcBef>
-                <a:spcPts val="0"/>
-              </a:spcBef>
-              <a:spcAft>
-                <a:spcPts val="0"/>
-              </a:spcAft>
-              <a:buSzPts val="1800"/>
-              <a:buChar char="●"/>
+            <a:pPr indent="0" lvl="0" marL="0" rtl="0" algn="l">
+              <a:spcBef>
+                <a:spcPts val="0"/>
+              </a:spcBef>
+              <a:spcAft>
+                <a:spcPts val="0"/>
+              </a:spcAft>
+              <a:buNone/>
             </a:pPr>
             <a:r>
               <a:rPr lang="en"/>
-              <a:t>Competitive exclusion rule tied to niche overlap</a:t>
-            </a:r>
-            <a:endParaRPr/>
-          </a:p>
-          <a:p>
-            <a:pPr indent="-342900" lvl="0" marL="457200" rtl="0" algn="l">
-              <a:spcBef>
-                <a:spcPts val="0"/>
-              </a:spcBef>
-              <a:spcAft>
-                <a:spcPts val="0"/>
-              </a:spcAft>
-              <a:buSzPts val="1800"/>
-              <a:buChar char="●"/>
+              <a:t>Grinnellian (Abiotic) Niche: Environmental requirements</a:t>
+            </a:r>
+            <a:endParaRPr/>
+          </a:p>
+          <a:p>
+            <a:pPr indent="0" lvl="0" marL="0" rtl="0" algn="l">
+              <a:spcBef>
+                <a:spcPts val="1200"/>
+              </a:spcBef>
+              <a:spcAft>
+                <a:spcPts val="0"/>
+              </a:spcAft>
+              <a:buNone/>
             </a:pPr>
             <a:r>
               <a:rPr lang="en"/>
-              <a:t>Do niches have to be identical?</a:t>
+              <a:t>Eltonian (Biotic) Niche: Species’ interactions in a community</a:t>
             </a:r>
             <a:endParaRPr/>
           </a:p>
@@ -12841,7 +12885,8 @@
               <a:buNone/>
             </a:pPr>
             <a:r>
-              <a:t/>
+              <a:rPr lang="en"/>
+              <a:t>Hutchinsonian (n-dimensional) Niche: Environment + Interactions</a:t>
             </a:r>
             <a:endParaRPr/>
           </a:p>
@@ -12849,7 +12894,7 @@
       </p:sp>
       <p:pic>
         <p:nvPicPr>
-          <p:cNvPr id="254" name="Google Shape;254;p41"/>
+          <p:cNvPr id="251" name="Google Shape;251;p41"/>
           <p:cNvPicPr preferRelativeResize="0"/>
           <p:nvPr/>
         </p:nvPicPr>
@@ -12863,8 +12908,63 @@
         </p:blipFill>
         <p:spPr>
           <a:xfrm>
-            <a:off x="5085900" y="1635075"/>
-            <a:ext cx="3746400" cy="3615425"/>
+            <a:off x="407550" y="2666800"/>
+            <a:ext cx="2434225" cy="2349131"/>
+          </a:xfrm>
+          <a:prstGeom prst="rect">
+            <a:avLst/>
+          </a:prstGeom>
+          <a:noFill/>
+          <a:ln>
+            <a:noFill/>
+          </a:ln>
+        </p:spPr>
+      </p:pic>
+      <p:pic>
+        <p:nvPicPr>
+          <p:cNvPr id="252" name="Google Shape;252;p41"/>
+          <p:cNvPicPr preferRelativeResize="0"/>
+          <p:nvPr/>
+        </p:nvPicPr>
+        <p:blipFill>
+          <a:blip r:embed="rId4">
+            <a:alphaModFix/>
+          </a:blip>
+          <a:stretch>
+            <a:fillRect/>
+          </a:stretch>
+        </p:blipFill>
+        <p:spPr>
+          <a:xfrm>
+            <a:off x="3259074" y="2666800"/>
+            <a:ext cx="2434225" cy="2349124"/>
+          </a:xfrm>
+          <a:prstGeom prst="rect">
+            <a:avLst/>
+          </a:prstGeom>
+          <a:noFill/>
+          <a:ln>
+            <a:noFill/>
+          </a:ln>
+        </p:spPr>
+      </p:pic>
+      <p:pic>
+        <p:nvPicPr>
+          <p:cNvPr id="253" name="Google Shape;253;p41"/>
+          <p:cNvPicPr preferRelativeResize="0"/>
+          <p:nvPr/>
+        </p:nvPicPr>
+        <p:blipFill rotWithShape="1">
+          <a:blip r:embed="rId5">
+            <a:alphaModFix/>
+          </a:blip>
+          <a:srcRect b="31824" l="7466" r="59305" t="16370"/>
+          <a:stretch/>
+        </p:blipFill>
+        <p:spPr>
+          <a:xfrm>
+            <a:off x="5966025" y="2622800"/>
+            <a:ext cx="2678626" cy="2349124"/>
           </a:xfrm>
           <a:prstGeom prst="rect">
             <a:avLst/>
@@ -13190,7 +13290,7 @@
                 <a:cs typeface="Calibri"/>
                 <a:sym typeface="Calibri"/>
               </a:rPr>
-              <a:t>Office Hours: TBA - ?</a:t>
+              <a:t>Office Hours: By appointment</a:t>
             </a:r>
             <a:endParaRPr sz="1500">
               <a:solidFill>
@@ -13249,7 +13349,7 @@
   <p:cSld>
     <p:spTree>
       <p:nvGrpSpPr>
-        <p:cNvPr id="258" name="Shape 258"/>
+        <p:cNvPr id="257" name="Shape 257"/>
         <p:cNvGrpSpPr/>
         <p:nvPr/>
       </p:nvGrpSpPr>
@@ -13263,7 +13363,7 @@
       </p:grpSpPr>
       <p:sp>
         <p:nvSpPr>
-          <p:cNvPr id="259" name="Google Shape;259;p42"/>
+          <p:cNvPr id="258" name="Google Shape;258;p42"/>
           <p:cNvSpPr txBox="1"/>
           <p:nvPr>
             <p:ph type="title"/>
@@ -13295,7 +13395,7 @@
             </a:pPr>
             <a:r>
               <a:rPr lang="en"/>
-              <a:t>Limiting similarity</a:t>
+              <a:t>Linking Niches to Competition</a:t>
             </a:r>
             <a:endParaRPr/>
           </a:p>
@@ -13303,7 +13403,7 @@
       </p:sp>
       <p:sp>
         <p:nvSpPr>
-          <p:cNvPr id="260" name="Google Shape;260;p42"/>
+          <p:cNvPr id="259" name="Google Shape;259;p42"/>
           <p:cNvSpPr txBox="1"/>
           <p:nvPr>
             <p:ph idx="1" type="body"/>
@@ -13336,7 +13436,24 @@
             </a:pPr>
             <a:r>
               <a:rPr lang="en"/>
-              <a:t>Improvement on the competitive exclusion principle </a:t>
+              <a:t>Competitive exclusion rule tied to niche overlap</a:t>
+            </a:r>
+            <a:endParaRPr/>
+          </a:p>
+          <a:p>
+            <a:pPr indent="-342900" lvl="0" marL="457200" rtl="0" algn="l">
+              <a:spcBef>
+                <a:spcPts val="0"/>
+              </a:spcBef>
+              <a:spcAft>
+                <a:spcPts val="0"/>
+              </a:spcAft>
+              <a:buSzPts val="1800"/>
+              <a:buChar char="●"/>
+            </a:pPr>
+            <a:r>
+              <a:rPr lang="en"/>
+              <a:t>Do niches have to be identical?</a:t>
             </a:r>
             <a:endParaRPr/>
           </a:p>
@@ -13359,7 +13476,7 @@
       </p:sp>
       <p:pic>
         <p:nvPicPr>
-          <p:cNvPr id="261" name="Google Shape;261;p42"/>
+          <p:cNvPr id="260" name="Google Shape;260;p42"/>
           <p:cNvPicPr preferRelativeResize="0"/>
           <p:nvPr/>
         </p:nvPicPr>
@@ -13373,8 +13490,8 @@
         </p:blipFill>
         <p:spPr>
           <a:xfrm>
-            <a:off x="578125" y="1922251"/>
-            <a:ext cx="6893451" cy="3013975"/>
+            <a:off x="5085900" y="1635075"/>
+            <a:ext cx="3746400" cy="3615425"/>
           </a:xfrm>
           <a:prstGeom prst="rect">
             <a:avLst/>
@@ -13398,7 +13515,7 @@
   <p:cSld>
     <p:spTree>
       <p:nvGrpSpPr>
-        <p:cNvPr id="265" name="Shape 265"/>
+        <p:cNvPr id="264" name="Shape 264"/>
         <p:cNvGrpSpPr/>
         <p:nvPr/>
       </p:nvGrpSpPr>
@@ -13412,7 +13529,7 @@
       </p:grpSpPr>
       <p:sp>
         <p:nvSpPr>
-          <p:cNvPr id="266" name="Google Shape;266;p43"/>
+          <p:cNvPr id="265" name="Google Shape;265;p43"/>
           <p:cNvSpPr txBox="1"/>
           <p:nvPr>
             <p:ph type="title"/>
@@ -13444,7 +13561,7 @@
             </a:pPr>
             <a:r>
               <a:rPr lang="en"/>
-              <a:t>Reality Set In</a:t>
+              <a:t>Limiting similarity</a:t>
             </a:r>
             <a:endParaRPr/>
           </a:p>
@@ -13452,7 +13569,7 @@
       </p:sp>
       <p:sp>
         <p:nvSpPr>
-          <p:cNvPr id="267" name="Google Shape;267;p43"/>
+          <p:cNvPr id="266" name="Google Shape;266;p43"/>
           <p:cNvSpPr txBox="1"/>
           <p:nvPr>
             <p:ph idx="1" type="body"/>
@@ -13485,63 +13602,55 @@
             </a:pPr>
             <a:r>
               <a:rPr lang="en"/>
-              <a:t>Nature is complicated</a:t>
-            </a:r>
-            <a:endParaRPr/>
-          </a:p>
-          <a:p>
-            <a:pPr indent="-342900" lvl="0" marL="457200" rtl="0" algn="l">
-              <a:spcBef>
-                <a:spcPts val="0"/>
-              </a:spcBef>
-              <a:spcAft>
-                <a:spcPts val="0"/>
-              </a:spcAft>
-              <a:buSzPts val="1800"/>
-              <a:buChar char="●"/>
-            </a:pPr>
-            <a:r>
-              <a:rPr lang="en"/>
-              <a:t>Competition isn’t the only thing to consider</a:t>
-            </a:r>
-            <a:endParaRPr/>
-          </a:p>
-          <a:p>
-            <a:pPr indent="-342900" lvl="0" marL="457200" rtl="0" algn="l">
-              <a:spcBef>
-                <a:spcPts val="0"/>
-              </a:spcBef>
-              <a:spcAft>
-                <a:spcPts val="0"/>
-              </a:spcAft>
-              <a:buSzPts val="1800"/>
-              <a:buChar char="●"/>
-            </a:pPr>
-            <a:r>
-              <a:rPr lang="en"/>
-              <a:t>Importance of null models</a:t>
-            </a:r>
-            <a:endParaRPr/>
-          </a:p>
-          <a:p>
-            <a:pPr indent="-342900" lvl="0" marL="457200" rtl="0" algn="l">
-              <a:spcBef>
-                <a:spcPts val="0"/>
-              </a:spcBef>
-              <a:spcAft>
-                <a:spcPts val="0"/>
-              </a:spcAft>
-              <a:buSzPts val="1800"/>
-              <a:buChar char="●"/>
-            </a:pPr>
-            <a:r>
-              <a:rPr lang="en"/>
-              <a:t>Different, interacting processes operate at different scales</a:t>
+              <a:t>Improvement on the competitive exclusion principle </a:t>
+            </a:r>
+            <a:endParaRPr/>
+          </a:p>
+          <a:p>
+            <a:pPr indent="0" lvl="0" marL="0" rtl="0" algn="l">
+              <a:spcBef>
+                <a:spcPts val="1200"/>
+              </a:spcBef>
+              <a:spcAft>
+                <a:spcPts val="1200"/>
+              </a:spcAft>
+              <a:buNone/>
+            </a:pPr>
+            <a:r>
+              <a:t/>
             </a:r>
             <a:endParaRPr/>
           </a:p>
         </p:txBody>
       </p:sp>
+      <p:pic>
+        <p:nvPicPr>
+          <p:cNvPr id="267" name="Google Shape;267;p43"/>
+          <p:cNvPicPr preferRelativeResize="0"/>
+          <p:nvPr/>
+        </p:nvPicPr>
+        <p:blipFill>
+          <a:blip r:embed="rId3">
+            <a:alphaModFix/>
+          </a:blip>
+          <a:stretch>
+            <a:fillRect/>
+          </a:stretch>
+        </p:blipFill>
+        <p:spPr>
+          <a:xfrm>
+            <a:off x="578125" y="1922251"/>
+            <a:ext cx="6893451" cy="3013975"/>
+          </a:xfrm>
+          <a:prstGeom prst="rect">
+            <a:avLst/>
+          </a:prstGeom>
+          <a:noFill/>
+          <a:ln>
+            <a:noFill/>
+          </a:ln>
+        </p:spPr>
+      </p:pic>
     </p:spTree>
   </p:cSld>
   <p:clrMapOvr>
@@ -13601,7 +13710,7 @@
             </a:pPr>
             <a:r>
               <a:rPr lang="en"/>
-              <a:t>Community Ecology Today</a:t>
+              <a:t>Reality Set In</a:t>
             </a:r>
             <a:endParaRPr/>
           </a:p>
@@ -13642,7 +13751,7 @@
             </a:pPr>
             <a:r>
               <a:rPr lang="en"/>
-              <a:t>Most of that “historical” stuff is still relevant</a:t>
+              <a:t>Nature is complicated</a:t>
             </a:r>
             <a:endParaRPr/>
           </a:p>
@@ -13659,7 +13768,7 @@
             </a:pPr>
             <a:r>
               <a:rPr lang="en"/>
-              <a:t>Embracing diversity of questions, mechanisms, approaches</a:t>
+              <a:t>Competition isn’t the only thing to consider</a:t>
             </a:r>
             <a:endParaRPr/>
           </a:p>
@@ -13676,7 +13785,7 @@
             </a:pPr>
             <a:r>
               <a:rPr lang="en"/>
-              <a:t>Fancy stats and computational methods</a:t>
+              <a:t>Importance of null models</a:t>
             </a:r>
             <a:endParaRPr/>
           </a:p>
@@ -13693,41 +13802,7 @@
             </a:pPr>
             <a:r>
               <a:rPr lang="en"/>
-              <a:t>New tools</a:t>
-            </a:r>
-            <a:endParaRPr/>
-          </a:p>
-          <a:p>
-            <a:pPr indent="-342900" lvl="0" marL="457200" rtl="0" algn="l">
-              <a:spcBef>
-                <a:spcPts val="0"/>
-              </a:spcBef>
-              <a:spcAft>
-                <a:spcPts val="0"/>
-              </a:spcAft>
-              <a:buSzPts val="1800"/>
-              <a:buChar char="●"/>
-            </a:pPr>
-            <a:r>
-              <a:rPr lang="en"/>
-              <a:t>Open Science / Open Data</a:t>
-            </a:r>
-            <a:endParaRPr/>
-          </a:p>
-          <a:p>
-            <a:pPr indent="-342900" lvl="0" marL="457200" rtl="0" algn="l">
-              <a:spcBef>
-                <a:spcPts val="0"/>
-              </a:spcBef>
-              <a:spcAft>
-                <a:spcPts val="0"/>
-              </a:spcAft>
-              <a:buSzPts val="1800"/>
-              <a:buChar char="●"/>
-            </a:pPr>
-            <a:r>
-              <a:rPr lang="en"/>
-              <a:t>Still lots of basic research and data to do</a:t>
+              <a:t>Different, interacting processes operate at different scales</a:t>
             </a:r>
             <a:endParaRPr/>
           </a:p>
@@ -13792,6 +13867,197 @@
             </a:pPr>
             <a:r>
               <a:rPr lang="en"/>
+              <a:t>Community Ecology Today</a:t>
+            </a:r>
+            <a:endParaRPr/>
+          </a:p>
+        </p:txBody>
+      </p:sp>
+      <p:sp>
+        <p:nvSpPr>
+          <p:cNvPr id="279" name="Google Shape;279;p45"/>
+          <p:cNvSpPr txBox="1"/>
+          <p:nvPr>
+            <p:ph idx="1" type="body"/>
+          </p:nvPr>
+        </p:nvSpPr>
+        <p:spPr>
+          <a:xfrm>
+            <a:off x="311700" y="1152475"/>
+            <a:ext cx="8520600" cy="3416400"/>
+          </a:xfrm>
+          <a:prstGeom prst="rect">
+            <a:avLst/>
+          </a:prstGeom>
+        </p:spPr>
+        <p:txBody>
+          <a:bodyPr anchorCtr="0" anchor="t" bIns="91425" lIns="91425" spcFirstLastPara="1" rIns="91425" wrap="square" tIns="91425">
+            <a:normAutofit/>
+          </a:bodyPr>
+          <a:lstStyle/>
+          <a:p>
+            <a:pPr indent="-342900" lvl="0" marL="457200" rtl="0" algn="l">
+              <a:spcBef>
+                <a:spcPts val="0"/>
+              </a:spcBef>
+              <a:spcAft>
+                <a:spcPts val="0"/>
+              </a:spcAft>
+              <a:buSzPts val="1800"/>
+              <a:buChar char="●"/>
+            </a:pPr>
+            <a:r>
+              <a:rPr lang="en"/>
+              <a:t>Most of that “historical” stuff is still relevant</a:t>
+            </a:r>
+            <a:endParaRPr/>
+          </a:p>
+          <a:p>
+            <a:pPr indent="-342900" lvl="0" marL="457200" rtl="0" algn="l">
+              <a:spcBef>
+                <a:spcPts val="0"/>
+              </a:spcBef>
+              <a:spcAft>
+                <a:spcPts val="0"/>
+              </a:spcAft>
+              <a:buSzPts val="1800"/>
+              <a:buChar char="●"/>
+            </a:pPr>
+            <a:r>
+              <a:rPr lang="en"/>
+              <a:t>Embracing diversity of questions, mechanisms, approaches</a:t>
+            </a:r>
+            <a:endParaRPr/>
+          </a:p>
+          <a:p>
+            <a:pPr indent="-342900" lvl="0" marL="457200" rtl="0" algn="l">
+              <a:spcBef>
+                <a:spcPts val="0"/>
+              </a:spcBef>
+              <a:spcAft>
+                <a:spcPts val="0"/>
+              </a:spcAft>
+              <a:buSzPts val="1800"/>
+              <a:buChar char="●"/>
+            </a:pPr>
+            <a:r>
+              <a:rPr lang="en"/>
+              <a:t>Fancy stats and computational methods</a:t>
+            </a:r>
+            <a:endParaRPr/>
+          </a:p>
+          <a:p>
+            <a:pPr indent="-342900" lvl="0" marL="457200" rtl="0" algn="l">
+              <a:spcBef>
+                <a:spcPts val="0"/>
+              </a:spcBef>
+              <a:spcAft>
+                <a:spcPts val="0"/>
+              </a:spcAft>
+              <a:buSzPts val="1800"/>
+              <a:buChar char="●"/>
+            </a:pPr>
+            <a:r>
+              <a:rPr lang="en"/>
+              <a:t>New tools</a:t>
+            </a:r>
+            <a:endParaRPr/>
+          </a:p>
+          <a:p>
+            <a:pPr indent="-342900" lvl="0" marL="457200" rtl="0" algn="l">
+              <a:spcBef>
+                <a:spcPts val="0"/>
+              </a:spcBef>
+              <a:spcAft>
+                <a:spcPts val="0"/>
+              </a:spcAft>
+              <a:buSzPts val="1800"/>
+              <a:buChar char="●"/>
+            </a:pPr>
+            <a:r>
+              <a:rPr lang="en"/>
+              <a:t>Open Science / Open Data</a:t>
+            </a:r>
+            <a:endParaRPr/>
+          </a:p>
+          <a:p>
+            <a:pPr indent="-342900" lvl="0" marL="457200" rtl="0" algn="l">
+              <a:spcBef>
+                <a:spcPts val="0"/>
+              </a:spcBef>
+              <a:spcAft>
+                <a:spcPts val="0"/>
+              </a:spcAft>
+              <a:buSzPts val="1800"/>
+              <a:buChar char="●"/>
+            </a:pPr>
+            <a:r>
+              <a:rPr lang="en"/>
+              <a:t>Still lots of basic research to do and data to collect</a:t>
+            </a:r>
+            <a:endParaRPr/>
+          </a:p>
+        </p:txBody>
+      </p:sp>
+    </p:spTree>
+  </p:cSld>
+  <p:clrMapOvr>
+    <a:masterClrMapping/>
+  </p:clrMapOvr>
+</p:sld>
+</file>
+
+<file path=ppt/slides/slide34.xml><?xml version="1.0" encoding="utf-8"?>
+<p:sld xmlns:a="http://schemas.openxmlformats.org/drawingml/2006/main" xmlns:r="http://schemas.openxmlformats.org/officeDocument/2006/relationships" xmlns:mc="http://schemas.openxmlformats.org/markup-compatibility/2006" xmlns:mv="urn:schemas-microsoft-com:mac:vml" xmlns:p="http://schemas.openxmlformats.org/presentationml/2006/main" xmlns:c="http://schemas.openxmlformats.org/drawingml/2006/chart" xmlns:dgm="http://schemas.openxmlformats.org/drawingml/2006/diagram" xmlns:o="urn:schemas-microsoft-com:office:office" xmlns:v="urn:schemas-microsoft-com:vml" xmlns:pvml="urn:schemas-microsoft-com:office:powerpoint" xmlns:com="http://schemas.openxmlformats.org/drawingml/2006/compatibility" xmlns:p14="http://schemas.microsoft.com/office/powerpoint/2010/main" xmlns:p15="http://schemas.microsoft.com/office/powerpoint/2012/main" xmlns:ahyp="http://schemas.microsoft.com/office/drawing/2018/hyperlinkcolor">
+  <p:cSld>
+    <p:spTree>
+      <p:nvGrpSpPr>
+        <p:cNvPr id="283" name="Shape 283"/>
+        <p:cNvGrpSpPr/>
+        <p:nvPr/>
+      </p:nvGrpSpPr>
+      <p:grpSpPr>
+        <a:xfrm>
+          <a:off x="0" y="0"/>
+          <a:ext cx="0" cy="0"/>
+          <a:chOff x="0" y="0"/>
+          <a:chExt cx="0" cy="0"/>
+        </a:xfrm>
+      </p:grpSpPr>
+      <p:sp>
+        <p:nvSpPr>
+          <p:cNvPr id="284" name="Google Shape;284;p46"/>
+          <p:cNvSpPr txBox="1"/>
+          <p:nvPr>
+            <p:ph type="title"/>
+          </p:nvPr>
+        </p:nvSpPr>
+        <p:spPr>
+          <a:xfrm>
+            <a:off x="311700" y="445025"/>
+            <a:ext cx="8520600" cy="572700"/>
+          </a:xfrm>
+          <a:prstGeom prst="rect">
+            <a:avLst/>
+          </a:prstGeom>
+        </p:spPr>
+        <p:txBody>
+          <a:bodyPr anchorCtr="0" anchor="t" bIns="91425" lIns="91425" spcFirstLastPara="1" rIns="91425" wrap="square" tIns="91425">
+            <a:normAutofit fontScale="90000"/>
+          </a:bodyPr>
+          <a:lstStyle/>
+          <a:p>
+            <a:pPr indent="0" lvl="0" marL="0" rtl="0" algn="l">
+              <a:spcBef>
+                <a:spcPts val="0"/>
+              </a:spcBef>
+              <a:spcAft>
+                <a:spcPts val="0"/>
+              </a:spcAft>
+              <a:buNone/>
+            </a:pPr>
+            <a:r>
+              <a:rPr lang="en"/>
               <a:t>Next Class: Diversity Patterns</a:t>
             </a:r>
             <a:endParaRPr/>
@@ -14005,7 +14271,7 @@
                 <a:cs typeface="Calibri"/>
                 <a:sym typeface="Calibri"/>
               </a:rPr>
-              <a:t>Projects (4x)					40%</a:t>
+              <a:t>Projects (4x)					45%</a:t>
             </a:r>
             <a:endParaRPr sz="1100">
               <a:solidFill>
@@ -14286,46 +14552,6 @@
                 <a:sym typeface="Calibri"/>
               </a:rPr>
               <a:t>Group Presentation Assignment		5%</a:t>
-            </a:r>
-            <a:endParaRPr sz="1100">
-              <a:solidFill>
-                <a:schemeClr val="dk1"/>
-              </a:solidFill>
-              <a:latin typeface="Calibri"/>
-              <a:ea typeface="Calibri"/>
-              <a:cs typeface="Calibri"/>
-              <a:sym typeface="Calibri"/>
-            </a:endParaRPr>
-          </a:p>
-          <a:p>
-            <a:pPr indent="0" lvl="0" marL="1082675" rtl="0" algn="l">
-              <a:lnSpc>
-                <a:spcPct val="100000"/>
-              </a:lnSpc>
-              <a:spcBef>
-                <a:spcPts val="0"/>
-              </a:spcBef>
-              <a:spcAft>
-                <a:spcPts val="0"/>
-              </a:spcAft>
-              <a:buClr>
-                <a:schemeClr val="dk1"/>
-              </a:buClr>
-              <a:buSzPts val="1100"/>
-              <a:buFont typeface="Arial"/>
-              <a:buNone/>
-            </a:pPr>
-            <a:r>
-              <a:rPr lang="en" sz="1100">
-                <a:solidFill>
-                  <a:schemeClr val="dk1"/>
-                </a:solidFill>
-                <a:latin typeface="Calibri"/>
-                <a:ea typeface="Calibri"/>
-                <a:cs typeface="Calibri"/>
-                <a:sym typeface="Calibri"/>
-              </a:rPr>
-              <a:t>TBD Assignment 				5%</a:t>
             </a:r>
             <a:endParaRPr/>
           </a:p>
@@ -14767,7 +14993,7 @@
             </a:pPr>
             <a:r>
               <a:rPr lang="en"/>
-              <a:t>Paper presentation assignment 1: Due Jan 29</a:t>
+              <a:t>Paper presentation assignment 1: Due Jan 28</a:t>
             </a:r>
             <a:endParaRPr/>
           </a:p>
@@ -14936,7 +15162,7 @@
             </a:pPr>
             <a:r>
               <a:rPr lang="en"/>
-              <a:t>Project 1: Diversity Patterns: Due Feb 7</a:t>
+              <a:t>Project 1: Diversity Patterns: Due Feb 6</a:t>
             </a:r>
             <a:endParaRPr/>
           </a:p>
@@ -14992,7 +15218,7 @@
             </a:pPr>
             <a:r>
               <a:rPr lang="en"/>
-              <a:t>Step 2: Find and read 10-20 relevant papers</a:t>
+              <a:t>Step 2: Find and read 5+ relevant papers</a:t>
             </a:r>
             <a:endParaRPr/>
           </a:p>
@@ -15127,6 +15353,285 @@
 </file>
 
 <file path=ppt/theme/theme1.xml><?xml version="1.0" encoding="utf-8"?>
+<a:theme xmlns:a="http://schemas.openxmlformats.org/drawingml/2006/main" xmlns:r="http://schemas.openxmlformats.org/officeDocument/2006/relationships">
+  <a:themeElements>
+    <a:clrScheme name="Default">
+      <a:dk1>
+        <a:srgbClr val="000000"/>
+      </a:dk1>
+      <a:lt1>
+        <a:srgbClr val="FFFFFF"/>
+      </a:lt1>
+      <a:dk2>
+        <a:srgbClr val="158158"/>
+      </a:dk2>
+      <a:lt2>
+        <a:srgbClr val="F3F3F3"/>
+      </a:lt2>
+      <a:accent1>
+        <a:srgbClr val="058DC7"/>
+      </a:accent1>
+      <a:accent2>
+        <a:srgbClr val="50B432"/>
+      </a:accent2>
+      <a:accent3>
+        <a:srgbClr val="ED561B"/>
+      </a:accent3>
+      <a:accent4>
+        <a:srgbClr val="EDEF00"/>
+      </a:accent4>
+      <a:accent5>
+        <a:srgbClr val="24CBE5"/>
+      </a:accent5>
+      <a:accent6>
+        <a:srgbClr val="64E572"/>
+      </a:accent6>
+      <a:hlink>
+        <a:srgbClr val="2200CC"/>
+      </a:hlink>
+      <a:folHlink>
+        <a:srgbClr val="551A8B"/>
+      </a:folHlink>
+    </a:clrScheme>
+    <a:fontScheme name="Office">
+      <a:majorFont>
+        <a:latin typeface="Arial"/>
+        <a:ea typeface=""/>
+        <a:cs typeface=""/>
+        <a:font script="Jpan" typeface="ＭＳ Ｐゴシック"/>
+        <a:font script="Hang" typeface="맑은 고딕"/>
+        <a:font script="Hans" typeface="宋体"/>
+        <a:font script="Hant" typeface="新細明體"/>
+        <a:font script="Arab" typeface="Times New Roman"/>
+        <a:font script="Hebr" typeface="Times New Roman"/>
+        <a:font script="Thai" typeface="Angsana New"/>
+        <a:font script="Ethi" typeface="Nyala"/>
+        <a:font script="Beng" typeface="Vrinda"/>
+        <a:font script="Gujr" typeface="Shruti"/>
+        <a:font script="Khmr" typeface="MoolBoran"/>
+        <a:font script="Knda" typeface="Tunga"/>
+        <a:font script="Guru" typeface="Raavi"/>
+        <a:font script="Cans" typeface="Euphemia"/>
+        <a:font script="Cher" typeface="Plantagenet Cherokee"/>
+        <a:font script="Yiii" typeface="Microsoft Yi Baiti"/>
+        <a:font script="Tibt" typeface="Microsoft Himalaya"/>
+        <a:font script="Thaa" typeface="MV Boli"/>
+        <a:font script="Deva" typeface="Mangal"/>
+        <a:font script="Telu" typeface="Gautami"/>
+        <a:font script="Taml" typeface="Latha"/>
+        <a:font script="Syrc" typeface="Estrangelo Edessa"/>
+        <a:font script="Orya" typeface="Kalinga"/>
+        <a:font script="Mlym" typeface="Kartika"/>
+        <a:font script="Laoo" typeface="DokChampa"/>
+        <a:font script="Sinh" typeface="Iskoola Pota"/>
+        <a:font script="Mong" typeface="Mongolian Baiti"/>
+        <a:font script="Viet" typeface="Times New Roman"/>
+        <a:font script="Uigh" typeface="Microsoft Uighur"/>
+        <a:font script="Geor" typeface="Sylfaen"/>
+      </a:majorFont>
+      <a:minorFont>
+        <a:latin typeface="Arial"/>
+        <a:ea typeface=""/>
+        <a:cs typeface=""/>
+        <a:font script="Jpan" typeface="ＭＳ Ｐゴシック"/>
+        <a:font script="Hang" typeface="맑은 고딕"/>
+        <a:font script="Hans" typeface="宋体"/>
+        <a:font script="Hant" typeface="新細明體"/>
+        <a:font script="Arab" typeface="Arial"/>
+        <a:font script="Hebr" typeface="Arial"/>
+        <a:font script="Thai" typeface="Cordia New"/>
+        <a:font script="Ethi" typeface="Nyala"/>
+        <a:font script="Beng" typeface="Vrinda"/>
+        <a:font script="Gujr" typeface="Shruti"/>
+        <a:font script="Khmr" typeface="DaunPenh"/>
+        <a:font script="Knda" typeface="Tunga"/>
+        <a:font script="Guru" typeface="Raavi"/>
+        <a:font script="Cans" typeface="Euphemia"/>
+        <a:font script="Cher" typeface="Plantagenet Cherokee"/>
+        <a:font script="Yiii" typeface="Microsoft Yi Baiti"/>
+        <a:font script="Tibt" typeface="Microsoft Himalaya"/>
+        <a:font script="Thaa" typeface="MV Boli"/>
+        <a:font script="Deva" typeface="Mangal"/>
+        <a:font script="Telu" typeface="Gautami"/>
+        <a:font script="Taml" typeface="Latha"/>
+        <a:font script="Syrc" typeface="Estrangelo Edessa"/>
+        <a:font script="Orya" typeface="Kalinga"/>
+        <a:font script="Mlym" typeface="Kartika"/>
+        <a:font script="Laoo" typeface="DokChampa"/>
+        <a:font script="Sinh" typeface="Iskoola Pota"/>
+        <a:font script="Mong" typeface="Mongolian Baiti"/>
+        <a:font script="Viet" typeface="Arial"/>
+        <a:font script="Uigh" typeface="Microsoft Uighur"/>
+        <a:font script="Geor" typeface="Sylfaen"/>
+      </a:minorFont>
+    </a:fontScheme>
+    <a:fmtScheme name="Office">
+      <a:fillStyleLst>
+        <a:solidFill>
+          <a:schemeClr val="phClr"/>
+        </a:solidFill>
+        <a:gradFill rotWithShape="1">
+          <a:gsLst>
+            <a:gs pos="0">
+              <a:schemeClr val="phClr">
+                <a:tint val="50000"/>
+                <a:satMod val="300000"/>
+              </a:schemeClr>
+            </a:gs>
+            <a:gs pos="35000">
+              <a:schemeClr val="phClr">
+                <a:tint val="37000"/>
+                <a:satMod val="300000"/>
+              </a:schemeClr>
+            </a:gs>
+            <a:gs pos="100000">
+              <a:schemeClr val="phClr">
+                <a:tint val="15000"/>
+                <a:satMod val="350000"/>
+              </a:schemeClr>
+            </a:gs>
+          </a:gsLst>
+          <a:lin ang="16200000" scaled="1"/>
+        </a:gradFill>
+        <a:gradFill rotWithShape="1">
+          <a:gsLst>
+            <a:gs pos="0">
+              <a:schemeClr val="phClr">
+                <a:tint val="100000"/>
+                <a:shade val="100000"/>
+                <a:satMod val="130000"/>
+              </a:schemeClr>
+            </a:gs>
+            <a:gs pos="100000">
+              <a:schemeClr val="phClr">
+                <a:tint val="50000"/>
+                <a:shade val="100000"/>
+                <a:satMod val="350000"/>
+              </a:schemeClr>
+            </a:gs>
+          </a:gsLst>
+          <a:lin ang="16200000" scaled="0"/>
+        </a:gradFill>
+      </a:fillStyleLst>
+      <a:lnStyleLst>
+        <a:ln w="9525" cap="flat" cmpd="sng" algn="ctr">
+          <a:solidFill>
+            <a:schemeClr val="phClr">
+              <a:shade val="95000"/>
+              <a:satMod val="105000"/>
+            </a:schemeClr>
+          </a:solidFill>
+          <a:prstDash val="solid"/>
+        </a:ln>
+        <a:ln w="25400" cap="flat" cmpd="sng" algn="ctr">
+          <a:solidFill>
+            <a:schemeClr val="phClr"/>
+          </a:solidFill>
+          <a:prstDash val="solid"/>
+        </a:ln>
+        <a:ln w="38100" cap="flat" cmpd="sng" algn="ctr">
+          <a:solidFill>
+            <a:schemeClr val="phClr"/>
+          </a:solidFill>
+          <a:prstDash val="solid"/>
+        </a:ln>
+      </a:lnStyleLst>
+      <a:effectStyleLst>
+        <a:effectStyle>
+          <a:effectLst>
+            <a:outerShdw blurRad="40000" dist="20000" dir="5400000" rotWithShape="0">
+              <a:srgbClr val="000000">
+                <a:alpha val="38000"/>
+              </a:srgbClr>
+            </a:outerShdw>
+          </a:effectLst>
+        </a:effectStyle>
+        <a:effectStyle>
+          <a:effectLst>
+            <a:outerShdw blurRad="40000" dist="23000" dir="5400000" rotWithShape="0">
+              <a:srgbClr val="000000">
+                <a:alpha val="35000"/>
+              </a:srgbClr>
+            </a:outerShdw>
+          </a:effectLst>
+        </a:effectStyle>
+        <a:effectStyle>
+          <a:effectLst>
+            <a:outerShdw blurRad="40000" dist="23000" dir="5400000" rotWithShape="0">
+              <a:srgbClr val="000000">
+                <a:alpha val="35000"/>
+              </a:srgbClr>
+            </a:outerShdw>
+          </a:effectLst>
+          <a:scene3d>
+            <a:camera prst="orthographicFront">
+              <a:rot lat="0" lon="0" rev="0"/>
+            </a:camera>
+            <a:lightRig rig="threePt" dir="t">
+              <a:rot lat="0" lon="0" rev="1200000"/>
+            </a:lightRig>
+          </a:scene3d>
+          <a:sp3d>
+            <a:bevelT w="63500" h="25400"/>
+          </a:sp3d>
+        </a:effectStyle>
+      </a:effectStyleLst>
+      <a:bgFillStyleLst>
+        <a:solidFill>
+          <a:schemeClr val="phClr"/>
+        </a:solidFill>
+        <a:gradFill rotWithShape="1">
+          <a:gsLst>
+            <a:gs pos="0">
+              <a:schemeClr val="phClr">
+                <a:tint val="40000"/>
+                <a:satMod val="350000"/>
+              </a:schemeClr>
+            </a:gs>
+            <a:gs pos="40000">
+              <a:schemeClr val="phClr">
+                <a:tint val="45000"/>
+                <a:shade val="99000"/>
+                <a:satMod val="350000"/>
+              </a:schemeClr>
+            </a:gs>
+            <a:gs pos="100000">
+              <a:schemeClr val="phClr">
+                <a:shade val="20000"/>
+                <a:satMod val="255000"/>
+              </a:schemeClr>
+            </a:gs>
+          </a:gsLst>
+          <a:path path="circle">
+            <a:fillToRect l="50000" t="-80000" r="50000" b="180000"/>
+          </a:path>
+        </a:gradFill>
+        <a:gradFill rotWithShape="1">
+          <a:gsLst>
+            <a:gs pos="0">
+              <a:schemeClr val="phClr">
+                <a:tint val="80000"/>
+                <a:satMod val="300000"/>
+              </a:schemeClr>
+            </a:gs>
+            <a:gs pos="100000">
+              <a:schemeClr val="phClr">
+                <a:shade val="30000"/>
+                <a:satMod val="200000"/>
+              </a:schemeClr>
+            </a:gs>
+          </a:gsLst>
+          <a:path path="circle">
+            <a:fillToRect l="50000" t="50000" r="50000" b="50000"/>
+          </a:path>
+        </a:gradFill>
+      </a:bgFillStyleLst>
+    </a:fmtScheme>
+  </a:themeElements>
+</a:theme>
+</file>
+
+<file path=ppt/theme/theme2.xml><?xml version="1.0" encoding="utf-8"?>
 <a:theme xmlns:a="http://schemas.openxmlformats.org/drawingml/2006/main" xmlns:r="http://schemas.openxmlformats.org/officeDocument/2006/relationships" name="Simple Light">
   <a:themeElements>
     <a:clrScheme name="Simple Light">
@@ -15403,283 +15908,4 @@
     </a:fmtScheme>
   </a:themeElements>
 </a:theme>
-</file>
-
-<file path=ppt/theme/theme2.xml><?xml version="1.0" encoding="utf-8"?>
-<a:theme xmlns:a="http://schemas.openxmlformats.org/drawingml/2006/main" xmlns:r="http://schemas.openxmlformats.org/officeDocument/2006/relationships">
-  <a:themeElements>
-    <a:clrScheme name="Default">
-      <a:dk1>
-        <a:srgbClr val="000000"/>
-      </a:dk1>
-      <a:lt1>
-        <a:srgbClr val="FFFFFF"/>
-      </a:lt1>
-      <a:dk2>
-        <a:srgbClr val="158158"/>
-      </a:dk2>
-      <a:lt2>
-        <a:srgbClr val="F3F3F3"/>
-      </a:lt2>
-      <a:accent1>
-        <a:srgbClr val="058DC7"/>
-      </a:accent1>
-      <a:accent2>
-        <a:srgbClr val="50B432"/>
-      </a:accent2>
-      <a:accent3>
-        <a:srgbClr val="ED561B"/>
-      </a:accent3>
-      <a:accent4>
-        <a:srgbClr val="EDEF00"/>
-      </a:accent4>
-      <a:accent5>
-        <a:srgbClr val="24CBE5"/>
-      </a:accent5>
-      <a:accent6>
-        <a:srgbClr val="64E572"/>
-      </a:accent6>
-      <a:hlink>
-        <a:srgbClr val="2200CC"/>
-      </a:hlink>
-      <a:folHlink>
-        <a:srgbClr val="551A8B"/>
-      </a:folHlink>
-    </a:clrScheme>
-    <a:fontScheme name="Office">
-      <a:majorFont>
-        <a:latin typeface="Arial"/>
-        <a:ea typeface=""/>
-        <a:cs typeface=""/>
-        <a:font script="Jpan" typeface="ＭＳ Ｐゴシック"/>
-        <a:font script="Hang" typeface="맑은 고딕"/>
-        <a:font script="Hans" typeface="宋体"/>
-        <a:font script="Hant" typeface="新細明體"/>
-        <a:font script="Arab" typeface="Times New Roman"/>
-        <a:font script="Hebr" typeface="Times New Roman"/>
-        <a:font script="Thai" typeface="Angsana New"/>
-        <a:font script="Ethi" typeface="Nyala"/>
-        <a:font script="Beng" typeface="Vrinda"/>
-        <a:font script="Gujr" typeface="Shruti"/>
-        <a:font script="Khmr" typeface="MoolBoran"/>
-        <a:font script="Knda" typeface="Tunga"/>
-        <a:font script="Guru" typeface="Raavi"/>
-        <a:font script="Cans" typeface="Euphemia"/>
-        <a:font script="Cher" typeface="Plantagenet Cherokee"/>
-        <a:font script="Yiii" typeface="Microsoft Yi Baiti"/>
-        <a:font script="Tibt" typeface="Microsoft Himalaya"/>
-        <a:font script="Thaa" typeface="MV Boli"/>
-        <a:font script="Deva" typeface="Mangal"/>
-        <a:font script="Telu" typeface="Gautami"/>
-        <a:font script="Taml" typeface="Latha"/>
-        <a:font script="Syrc" typeface="Estrangelo Edessa"/>
-        <a:font script="Orya" typeface="Kalinga"/>
-        <a:font script="Mlym" typeface="Kartika"/>
-        <a:font script="Laoo" typeface="DokChampa"/>
-        <a:font script="Sinh" typeface="Iskoola Pota"/>
-        <a:font script="Mong" typeface="Mongolian Baiti"/>
-        <a:font script="Viet" typeface="Times New Roman"/>
-        <a:font script="Uigh" typeface="Microsoft Uighur"/>
-        <a:font script="Geor" typeface="Sylfaen"/>
-      </a:majorFont>
-      <a:minorFont>
-        <a:latin typeface="Arial"/>
-        <a:ea typeface=""/>
-        <a:cs typeface=""/>
-        <a:font script="Jpan" typeface="ＭＳ Ｐゴシック"/>
-        <a:font script="Hang" typeface="맑은 고딕"/>
-        <a:font script="Hans" typeface="宋体"/>
-        <a:font script="Hant" typeface="新細明體"/>
-        <a:font script="Arab" typeface="Arial"/>
-        <a:font script="Hebr" typeface="Arial"/>
-        <a:font script="Thai" typeface="Cordia New"/>
-        <a:font script="Ethi" typeface="Nyala"/>
-        <a:font script="Beng" typeface="Vrinda"/>
-        <a:font script="Gujr" typeface="Shruti"/>
-        <a:font script="Khmr" typeface="DaunPenh"/>
-        <a:font script="Knda" typeface="Tunga"/>
-        <a:font script="Guru" typeface="Raavi"/>
-        <a:font script="Cans" typeface="Euphemia"/>
-        <a:font script="Cher" typeface="Plantagenet Cherokee"/>
-        <a:font script="Yiii" typeface="Microsoft Yi Baiti"/>
-        <a:font script="Tibt" typeface="Microsoft Himalaya"/>
-        <a:font script="Thaa" typeface="MV Boli"/>
-        <a:font script="Deva" typeface="Mangal"/>
-        <a:font script="Telu" typeface="Gautami"/>
-        <a:font script="Taml" typeface="Latha"/>
-        <a:font script="Syrc" typeface="Estrangelo Edessa"/>
-        <a:font script="Orya" typeface="Kalinga"/>
-        <a:font script="Mlym" typeface="Kartika"/>
-        <a:font script="Laoo" typeface="DokChampa"/>
-        <a:font script="Sinh" typeface="Iskoola Pota"/>
-        <a:font script="Mong" typeface="Mongolian Baiti"/>
-        <a:font script="Viet" typeface="Arial"/>
-        <a:font script="Uigh" typeface="Microsoft Uighur"/>
-        <a:font script="Geor" typeface="Sylfaen"/>
-      </a:minorFont>
-    </a:fontScheme>
-    <a:fmtScheme name="Office">
-      <a:fillStyleLst>
-        <a:solidFill>
-          <a:schemeClr val="phClr"/>
-        </a:solidFill>
-        <a:gradFill rotWithShape="1">
-          <a:gsLst>
-            <a:gs pos="0">
-              <a:schemeClr val="phClr">
-                <a:tint val="50000"/>
-                <a:satMod val="300000"/>
-              </a:schemeClr>
-            </a:gs>
-            <a:gs pos="35000">
-              <a:schemeClr val="phClr">
-                <a:tint val="37000"/>
-                <a:satMod val="300000"/>
-              </a:schemeClr>
-            </a:gs>
-            <a:gs pos="100000">
-              <a:schemeClr val="phClr">
-                <a:tint val="15000"/>
-                <a:satMod val="350000"/>
-              </a:schemeClr>
-            </a:gs>
-          </a:gsLst>
-          <a:lin ang="16200000" scaled="1"/>
-        </a:gradFill>
-        <a:gradFill rotWithShape="1">
-          <a:gsLst>
-            <a:gs pos="0">
-              <a:schemeClr val="phClr">
-                <a:tint val="100000"/>
-                <a:shade val="100000"/>
-                <a:satMod val="130000"/>
-              </a:schemeClr>
-            </a:gs>
-            <a:gs pos="100000">
-              <a:schemeClr val="phClr">
-                <a:tint val="50000"/>
-                <a:shade val="100000"/>
-                <a:satMod val="350000"/>
-              </a:schemeClr>
-            </a:gs>
-          </a:gsLst>
-          <a:lin ang="16200000" scaled="0"/>
-        </a:gradFill>
-      </a:fillStyleLst>
-      <a:lnStyleLst>
-        <a:ln w="9525" cap="flat" cmpd="sng" algn="ctr">
-          <a:solidFill>
-            <a:schemeClr val="phClr">
-              <a:shade val="95000"/>
-              <a:satMod val="105000"/>
-            </a:schemeClr>
-          </a:solidFill>
-          <a:prstDash val="solid"/>
-        </a:ln>
-        <a:ln w="25400" cap="flat" cmpd="sng" algn="ctr">
-          <a:solidFill>
-            <a:schemeClr val="phClr"/>
-          </a:solidFill>
-          <a:prstDash val="solid"/>
-        </a:ln>
-        <a:ln w="38100" cap="flat" cmpd="sng" algn="ctr">
-          <a:solidFill>
-            <a:schemeClr val="phClr"/>
-          </a:solidFill>
-          <a:prstDash val="solid"/>
-        </a:ln>
-      </a:lnStyleLst>
-      <a:effectStyleLst>
-        <a:effectStyle>
-          <a:effectLst>
-            <a:outerShdw blurRad="40000" dist="20000" dir="5400000" rotWithShape="0">
-              <a:srgbClr val="000000">
-                <a:alpha val="38000"/>
-              </a:srgbClr>
-            </a:outerShdw>
-          </a:effectLst>
-        </a:effectStyle>
-        <a:effectStyle>
-          <a:effectLst>
-            <a:outerShdw blurRad="40000" dist="23000" dir="5400000" rotWithShape="0">
-              <a:srgbClr val="000000">
-                <a:alpha val="35000"/>
-              </a:srgbClr>
-            </a:outerShdw>
-          </a:effectLst>
-        </a:effectStyle>
-        <a:effectStyle>
-          <a:effectLst>
-            <a:outerShdw blurRad="40000" dist="23000" dir="5400000" rotWithShape="0">
-              <a:srgbClr val="000000">
-                <a:alpha val="35000"/>
-              </a:srgbClr>
-            </a:outerShdw>
-          </a:effectLst>
-          <a:scene3d>
-            <a:camera prst="orthographicFront">
-              <a:rot lat="0" lon="0" rev="0"/>
-            </a:camera>
-            <a:lightRig rig="threePt" dir="t">
-              <a:rot lat="0" lon="0" rev="1200000"/>
-            </a:lightRig>
-          </a:scene3d>
-          <a:sp3d>
-            <a:bevelT w="63500" h="25400"/>
-          </a:sp3d>
-        </a:effectStyle>
-      </a:effectStyleLst>
-      <a:bgFillStyleLst>
-        <a:solidFill>
-          <a:schemeClr val="phClr"/>
-        </a:solidFill>
-        <a:gradFill rotWithShape="1">
-          <a:gsLst>
-            <a:gs pos="0">
-              <a:schemeClr val="phClr">
-                <a:tint val="40000"/>
-                <a:satMod val="350000"/>
-              </a:schemeClr>
-            </a:gs>
-            <a:gs pos="40000">
-              <a:schemeClr val="phClr">
-                <a:tint val="45000"/>
-                <a:shade val="99000"/>
-                <a:satMod val="350000"/>
-              </a:schemeClr>
-            </a:gs>
-            <a:gs pos="100000">
-              <a:schemeClr val="phClr">
-                <a:shade val="20000"/>
-                <a:satMod val="255000"/>
-              </a:schemeClr>
-            </a:gs>
-          </a:gsLst>
-          <a:path path="circle">
-            <a:fillToRect l="50000" t="-80000" r="50000" b="180000"/>
-          </a:path>
-        </a:gradFill>
-        <a:gradFill rotWithShape="1">
-          <a:gsLst>
-            <a:gs pos="0">
-              <a:schemeClr val="phClr">
-                <a:tint val="80000"/>
-                <a:satMod val="300000"/>
-              </a:schemeClr>
-            </a:gs>
-            <a:gs pos="100000">
-              <a:schemeClr val="phClr">
-                <a:shade val="30000"/>
-                <a:satMod val="200000"/>
-              </a:schemeClr>
-            </a:gs>
-          </a:gsLst>
-          <a:path path="circle">
-            <a:fillToRect l="50000" t="50000" r="50000" b="50000"/>
-          </a:path>
-        </a:gradFill>
-      </a:bgFillStyleLst>
-    </a:fmtScheme>
-  </a:themeElements>
-</a:theme>
 </file>